--- a/生命聖詩/(生命聖詩12)你真偉大.pptx
+++ b/生命聖詩/(生命聖詩12)你真偉大.pptx
@@ -5,12 +5,16 @@
     <p:sldMasterId id="2147483660" r:id="rId1"/>
   </p:sldMasterIdLst>
   <p:sldIdLst>
-    <p:sldId id="256" r:id="rId2"/>
-    <p:sldId id="257" r:id="rId3"/>
-    <p:sldId id="258" r:id="rId4"/>
-    <p:sldId id="259" r:id="rId5"/>
-    <p:sldId id="260" r:id="rId6"/>
-    <p:sldId id="261" r:id="rId7"/>
+    <p:sldId id="393" r:id="rId2"/>
+    <p:sldId id="412" r:id="rId3"/>
+    <p:sldId id="413" r:id="rId4"/>
+    <p:sldId id="414" r:id="rId5"/>
+    <p:sldId id="415" r:id="rId6"/>
+    <p:sldId id="416" r:id="rId7"/>
+    <p:sldId id="417" r:id="rId8"/>
+    <p:sldId id="418" r:id="rId9"/>
+    <p:sldId id="419" r:id="rId10"/>
+    <p:sldId id="420" r:id="rId11"/>
   </p:sldIdLst>
   <p:sldSz cx="9144000" cy="5143500" type="screen16x9"/>
   <p:notesSz cx="6858000" cy="9144000"/>
@@ -109,6 +113,22 @@
       </a:defRPr>
     </a:lvl9pPr>
   </p:defaultTextStyle>
+  <p:extLst>
+    <p:ext uri="{EFAFB233-063F-42B5-8137-9DF3F51BA10A}">
+      <p15:sldGuideLst xmlns:p15="http://schemas.microsoft.com/office/powerpoint/2012/main">
+        <p15:guide id="1" orient="horz" pos="1620">
+          <p15:clr>
+            <a:srgbClr val="A4A3A4"/>
+          </p15:clr>
+        </p15:guide>
+        <p15:guide id="2" pos="2880">
+          <p15:clr>
+            <a:srgbClr val="A4A3A4"/>
+          </p15:clr>
+        </p15:guide>
+      </p15:sldGuideLst>
+    </p:ext>
+  </p:extLst>
 </p:presentation>
 </file>
 
@@ -150,10 +170,9 @@
           <a:lstStyle/>
           <a:p>
             <a:r>
-              <a:rPr lang="zh-TW" altLang="en-US" smtClean="0"/>
+              <a:rPr lang="zh-TW" altLang="en-US"/>
               <a:t>按一下以編輯母片標題樣式</a:t>
             </a:r>
-            <a:endParaRPr lang="zh-TW" altLang="en-US"/>
           </a:p>
         </p:txBody>
       </p:sp>
@@ -269,10 +288,9 @@
           </a:lstStyle>
           <a:p>
             <a:r>
-              <a:rPr lang="zh-TW" altLang="en-US" smtClean="0"/>
+              <a:rPr lang="zh-TW" altLang="en-US"/>
               <a:t>按一下以編輯母片副標題樣式</a:t>
             </a:r>
-            <a:endParaRPr lang="zh-TW" altLang="en-US"/>
           </a:p>
         </p:txBody>
       </p:sp>
@@ -293,7 +311,7 @@
           <a:p>
             <a:fld id="{6F7D173A-6F86-48C7-BA6E-5017A77567EA}" type="datetimeFigureOut">
               <a:rPr lang="zh-TW" altLang="en-US" smtClean="0"/>
-              <a:t>2019/8/3</a:t>
+              <a:t>2025/7/5</a:t>
             </a:fld>
             <a:endParaRPr lang="zh-TW" altLang="en-US"/>
           </a:p>
@@ -382,10 +400,9 @@
           <a:lstStyle/>
           <a:p>
             <a:r>
-              <a:rPr lang="zh-TW" altLang="en-US" smtClean="0"/>
+              <a:rPr lang="zh-TW" altLang="en-US"/>
               <a:t>按一下以編輯母片標題樣式</a:t>
             </a:r>
-            <a:endParaRPr lang="zh-TW" altLang="en-US"/>
           </a:p>
         </p:txBody>
       </p:sp>
@@ -406,38 +423,37 @@
           <a:p>
             <a:pPr lvl="0"/>
             <a:r>
-              <a:rPr lang="zh-TW" altLang="en-US" smtClean="0"/>
+              <a:rPr lang="zh-TW" altLang="en-US"/>
               <a:t>按一下以編輯母片文字樣式</a:t>
             </a:r>
           </a:p>
           <a:p>
             <a:pPr lvl="1"/>
             <a:r>
-              <a:rPr lang="zh-TW" altLang="en-US" smtClean="0"/>
+              <a:rPr lang="zh-TW" altLang="en-US"/>
               <a:t>第二層</a:t>
             </a:r>
           </a:p>
           <a:p>
             <a:pPr lvl="2"/>
             <a:r>
-              <a:rPr lang="zh-TW" altLang="en-US" smtClean="0"/>
+              <a:rPr lang="zh-TW" altLang="en-US"/>
               <a:t>第三層</a:t>
             </a:r>
           </a:p>
           <a:p>
             <a:pPr lvl="3"/>
             <a:r>
-              <a:rPr lang="zh-TW" altLang="en-US" smtClean="0"/>
+              <a:rPr lang="zh-TW" altLang="en-US"/>
               <a:t>第四層</a:t>
             </a:r>
           </a:p>
           <a:p>
             <a:pPr lvl="4"/>
             <a:r>
-              <a:rPr lang="zh-TW" altLang="en-US" smtClean="0"/>
+              <a:rPr lang="zh-TW" altLang="en-US"/>
               <a:t>第五層</a:t>
             </a:r>
-            <a:endParaRPr lang="zh-TW" altLang="en-US"/>
           </a:p>
         </p:txBody>
       </p:sp>
@@ -458,7 +474,7 @@
           <a:p>
             <a:fld id="{6F7D173A-6F86-48C7-BA6E-5017A77567EA}" type="datetimeFigureOut">
               <a:rPr lang="zh-TW" altLang="en-US" smtClean="0"/>
-              <a:t>2019/8/3</a:t>
+              <a:t>2025/7/5</a:t>
             </a:fld>
             <a:endParaRPr lang="zh-TW" altLang="en-US"/>
           </a:p>
@@ -552,10 +568,9 @@
           <a:lstStyle/>
           <a:p>
             <a:r>
-              <a:rPr lang="zh-TW" altLang="en-US" smtClean="0"/>
+              <a:rPr lang="zh-TW" altLang="en-US"/>
               <a:t>按一下以編輯母片標題樣式</a:t>
             </a:r>
-            <a:endParaRPr lang="zh-TW" altLang="en-US"/>
           </a:p>
         </p:txBody>
       </p:sp>
@@ -581,38 +596,37 @@
           <a:p>
             <a:pPr lvl="0"/>
             <a:r>
-              <a:rPr lang="zh-TW" altLang="en-US" smtClean="0"/>
+              <a:rPr lang="zh-TW" altLang="en-US"/>
               <a:t>按一下以編輯母片文字樣式</a:t>
             </a:r>
           </a:p>
           <a:p>
             <a:pPr lvl="1"/>
             <a:r>
-              <a:rPr lang="zh-TW" altLang="en-US" smtClean="0"/>
+              <a:rPr lang="zh-TW" altLang="en-US"/>
               <a:t>第二層</a:t>
             </a:r>
           </a:p>
           <a:p>
             <a:pPr lvl="2"/>
             <a:r>
-              <a:rPr lang="zh-TW" altLang="en-US" smtClean="0"/>
+              <a:rPr lang="zh-TW" altLang="en-US"/>
               <a:t>第三層</a:t>
             </a:r>
           </a:p>
           <a:p>
             <a:pPr lvl="3"/>
             <a:r>
-              <a:rPr lang="zh-TW" altLang="en-US" smtClean="0"/>
+              <a:rPr lang="zh-TW" altLang="en-US"/>
               <a:t>第四層</a:t>
             </a:r>
           </a:p>
           <a:p>
             <a:pPr lvl="4"/>
             <a:r>
-              <a:rPr lang="zh-TW" altLang="en-US" smtClean="0"/>
+              <a:rPr lang="zh-TW" altLang="en-US"/>
               <a:t>第五層</a:t>
             </a:r>
-            <a:endParaRPr lang="zh-TW" altLang="en-US"/>
           </a:p>
         </p:txBody>
       </p:sp>
@@ -633,7 +647,7 @@
           <a:p>
             <a:fld id="{6F7D173A-6F86-48C7-BA6E-5017A77567EA}" type="datetimeFigureOut">
               <a:rPr lang="zh-TW" altLang="en-US" smtClean="0"/>
-              <a:t>2019/8/3</a:t>
+              <a:t>2025/7/5</a:t>
             </a:fld>
             <a:endParaRPr lang="zh-TW" altLang="en-US"/>
           </a:p>
@@ -722,10 +736,9 @@
           <a:lstStyle/>
           <a:p>
             <a:r>
-              <a:rPr lang="zh-TW" altLang="en-US" smtClean="0"/>
+              <a:rPr lang="zh-TW" altLang="en-US"/>
               <a:t>按一下以編輯母片標題樣式</a:t>
             </a:r>
-            <a:endParaRPr lang="zh-TW" altLang="en-US"/>
           </a:p>
         </p:txBody>
       </p:sp>
@@ -746,38 +759,37 @@
           <a:p>
             <a:pPr lvl="0"/>
             <a:r>
-              <a:rPr lang="zh-TW" altLang="en-US" smtClean="0"/>
+              <a:rPr lang="zh-TW" altLang="en-US"/>
               <a:t>按一下以編輯母片文字樣式</a:t>
             </a:r>
           </a:p>
           <a:p>
             <a:pPr lvl="1"/>
             <a:r>
-              <a:rPr lang="zh-TW" altLang="en-US" smtClean="0"/>
+              <a:rPr lang="zh-TW" altLang="en-US"/>
               <a:t>第二層</a:t>
             </a:r>
           </a:p>
           <a:p>
             <a:pPr lvl="2"/>
             <a:r>
-              <a:rPr lang="zh-TW" altLang="en-US" smtClean="0"/>
+              <a:rPr lang="zh-TW" altLang="en-US"/>
               <a:t>第三層</a:t>
             </a:r>
           </a:p>
           <a:p>
             <a:pPr lvl="3"/>
             <a:r>
-              <a:rPr lang="zh-TW" altLang="en-US" smtClean="0"/>
+              <a:rPr lang="zh-TW" altLang="en-US"/>
               <a:t>第四層</a:t>
             </a:r>
           </a:p>
           <a:p>
             <a:pPr lvl="4"/>
             <a:r>
-              <a:rPr lang="zh-TW" altLang="en-US" smtClean="0"/>
+              <a:rPr lang="zh-TW" altLang="en-US"/>
               <a:t>第五層</a:t>
             </a:r>
-            <a:endParaRPr lang="zh-TW" altLang="en-US"/>
           </a:p>
         </p:txBody>
       </p:sp>
@@ -798,7 +810,7 @@
           <a:p>
             <a:fld id="{6F7D173A-6F86-48C7-BA6E-5017A77567EA}" type="datetimeFigureOut">
               <a:rPr lang="zh-TW" altLang="en-US" smtClean="0"/>
-              <a:t>2019/8/3</a:t>
+              <a:t>2025/7/5</a:t>
             </a:fld>
             <a:endParaRPr lang="zh-TW" altLang="en-US"/>
           </a:p>
@@ -896,10 +908,9 @@
           </a:lstStyle>
           <a:p>
             <a:r>
-              <a:rPr lang="zh-TW" altLang="en-US" smtClean="0"/>
+              <a:rPr lang="zh-TW" altLang="en-US"/>
               <a:t>按一下以編輯母片標題樣式</a:t>
             </a:r>
-            <a:endParaRPr lang="zh-TW" altLang="en-US"/>
           </a:p>
         </p:txBody>
       </p:sp>
@@ -1016,7 +1027,7 @@
           <a:p>
             <a:pPr lvl="0"/>
             <a:r>
-              <a:rPr lang="zh-TW" altLang="en-US" smtClean="0"/>
+              <a:rPr lang="zh-TW" altLang="en-US"/>
               <a:t>按一下以編輯母片文字樣式</a:t>
             </a:r>
           </a:p>
@@ -1039,7 +1050,7 @@
           <a:p>
             <a:fld id="{6F7D173A-6F86-48C7-BA6E-5017A77567EA}" type="datetimeFigureOut">
               <a:rPr lang="zh-TW" altLang="en-US" smtClean="0"/>
-              <a:t>2019/8/3</a:t>
+              <a:t>2025/7/5</a:t>
             </a:fld>
             <a:endParaRPr lang="zh-TW" altLang="en-US"/>
           </a:p>
@@ -1128,10 +1139,9 @@
           <a:lstStyle/>
           <a:p>
             <a:r>
-              <a:rPr lang="zh-TW" altLang="en-US" smtClean="0"/>
+              <a:rPr lang="zh-TW" altLang="en-US"/>
               <a:t>按一下以編輯母片標題樣式</a:t>
             </a:r>
-            <a:endParaRPr lang="zh-TW" altLang="en-US"/>
           </a:p>
         </p:txBody>
       </p:sp>
@@ -1185,38 +1195,37 @@
           <a:p>
             <a:pPr lvl="0"/>
             <a:r>
-              <a:rPr lang="zh-TW" altLang="en-US" smtClean="0"/>
+              <a:rPr lang="zh-TW" altLang="en-US"/>
               <a:t>按一下以編輯母片文字樣式</a:t>
             </a:r>
           </a:p>
           <a:p>
             <a:pPr lvl="1"/>
             <a:r>
-              <a:rPr lang="zh-TW" altLang="en-US" smtClean="0"/>
+              <a:rPr lang="zh-TW" altLang="en-US"/>
               <a:t>第二層</a:t>
             </a:r>
           </a:p>
           <a:p>
             <a:pPr lvl="2"/>
             <a:r>
-              <a:rPr lang="zh-TW" altLang="en-US" smtClean="0"/>
+              <a:rPr lang="zh-TW" altLang="en-US"/>
               <a:t>第三層</a:t>
             </a:r>
           </a:p>
           <a:p>
             <a:pPr lvl="3"/>
             <a:r>
-              <a:rPr lang="zh-TW" altLang="en-US" smtClean="0"/>
+              <a:rPr lang="zh-TW" altLang="en-US"/>
               <a:t>第四層</a:t>
             </a:r>
           </a:p>
           <a:p>
             <a:pPr lvl="4"/>
             <a:r>
-              <a:rPr lang="zh-TW" altLang="en-US" smtClean="0"/>
+              <a:rPr lang="zh-TW" altLang="en-US"/>
               <a:t>第五層</a:t>
             </a:r>
-            <a:endParaRPr lang="zh-TW" altLang="en-US"/>
           </a:p>
         </p:txBody>
       </p:sp>
@@ -1270,38 +1279,37 @@
           <a:p>
             <a:pPr lvl="0"/>
             <a:r>
-              <a:rPr lang="zh-TW" altLang="en-US" smtClean="0"/>
+              <a:rPr lang="zh-TW" altLang="en-US"/>
               <a:t>按一下以編輯母片文字樣式</a:t>
             </a:r>
           </a:p>
           <a:p>
             <a:pPr lvl="1"/>
             <a:r>
-              <a:rPr lang="zh-TW" altLang="en-US" smtClean="0"/>
+              <a:rPr lang="zh-TW" altLang="en-US"/>
               <a:t>第二層</a:t>
             </a:r>
           </a:p>
           <a:p>
             <a:pPr lvl="2"/>
             <a:r>
-              <a:rPr lang="zh-TW" altLang="en-US" smtClean="0"/>
+              <a:rPr lang="zh-TW" altLang="en-US"/>
               <a:t>第三層</a:t>
             </a:r>
           </a:p>
           <a:p>
             <a:pPr lvl="3"/>
             <a:r>
-              <a:rPr lang="zh-TW" altLang="en-US" smtClean="0"/>
+              <a:rPr lang="zh-TW" altLang="en-US"/>
               <a:t>第四層</a:t>
             </a:r>
           </a:p>
           <a:p>
             <a:pPr lvl="4"/>
             <a:r>
-              <a:rPr lang="zh-TW" altLang="en-US" smtClean="0"/>
+              <a:rPr lang="zh-TW" altLang="en-US"/>
               <a:t>第五層</a:t>
             </a:r>
-            <a:endParaRPr lang="zh-TW" altLang="en-US"/>
           </a:p>
         </p:txBody>
       </p:sp>
@@ -1322,7 +1330,7 @@
           <a:p>
             <a:fld id="{6F7D173A-6F86-48C7-BA6E-5017A77567EA}" type="datetimeFigureOut">
               <a:rPr lang="zh-TW" altLang="en-US" smtClean="0"/>
-              <a:t>2019/8/3</a:t>
+              <a:t>2025/7/5</a:t>
             </a:fld>
             <a:endParaRPr lang="zh-TW" altLang="en-US"/>
           </a:p>
@@ -1415,10 +1423,9 @@
           </a:lstStyle>
           <a:p>
             <a:r>
-              <a:rPr lang="zh-TW" altLang="en-US" smtClean="0"/>
+              <a:rPr lang="zh-TW" altLang="en-US"/>
               <a:t>按一下以編輯母片標題樣式</a:t>
             </a:r>
-            <a:endParaRPr lang="zh-TW" altLang="en-US"/>
           </a:p>
         </p:txBody>
       </p:sp>
@@ -1481,7 +1488,7 @@
           <a:p>
             <a:pPr lvl="0"/>
             <a:r>
-              <a:rPr lang="zh-TW" altLang="en-US" smtClean="0"/>
+              <a:rPr lang="zh-TW" altLang="en-US"/>
               <a:t>按一下以編輯母片文字樣式</a:t>
             </a:r>
           </a:p>
@@ -1537,38 +1544,37 @@
           <a:p>
             <a:pPr lvl="0"/>
             <a:r>
-              <a:rPr lang="zh-TW" altLang="en-US" smtClean="0"/>
+              <a:rPr lang="zh-TW" altLang="en-US"/>
               <a:t>按一下以編輯母片文字樣式</a:t>
             </a:r>
           </a:p>
           <a:p>
             <a:pPr lvl="1"/>
             <a:r>
-              <a:rPr lang="zh-TW" altLang="en-US" smtClean="0"/>
+              <a:rPr lang="zh-TW" altLang="en-US"/>
               <a:t>第二層</a:t>
             </a:r>
           </a:p>
           <a:p>
             <a:pPr lvl="2"/>
             <a:r>
-              <a:rPr lang="zh-TW" altLang="en-US" smtClean="0"/>
+              <a:rPr lang="zh-TW" altLang="en-US"/>
               <a:t>第三層</a:t>
             </a:r>
           </a:p>
           <a:p>
             <a:pPr lvl="3"/>
             <a:r>
-              <a:rPr lang="zh-TW" altLang="en-US" smtClean="0"/>
+              <a:rPr lang="zh-TW" altLang="en-US"/>
               <a:t>第四層</a:t>
             </a:r>
           </a:p>
           <a:p>
             <a:pPr lvl="4"/>
             <a:r>
-              <a:rPr lang="zh-TW" altLang="en-US" smtClean="0"/>
+              <a:rPr lang="zh-TW" altLang="en-US"/>
               <a:t>第五層</a:t>
             </a:r>
-            <a:endParaRPr lang="zh-TW" altLang="en-US"/>
           </a:p>
         </p:txBody>
       </p:sp>
@@ -1631,7 +1637,7 @@
           <a:p>
             <a:pPr lvl="0"/>
             <a:r>
-              <a:rPr lang="zh-TW" altLang="en-US" smtClean="0"/>
+              <a:rPr lang="zh-TW" altLang="en-US"/>
               <a:t>按一下以編輯母片文字樣式</a:t>
             </a:r>
           </a:p>
@@ -1687,38 +1693,37 @@
           <a:p>
             <a:pPr lvl="0"/>
             <a:r>
-              <a:rPr lang="zh-TW" altLang="en-US" smtClean="0"/>
+              <a:rPr lang="zh-TW" altLang="en-US"/>
               <a:t>按一下以編輯母片文字樣式</a:t>
             </a:r>
           </a:p>
           <a:p>
             <a:pPr lvl="1"/>
             <a:r>
-              <a:rPr lang="zh-TW" altLang="en-US" smtClean="0"/>
+              <a:rPr lang="zh-TW" altLang="en-US"/>
               <a:t>第二層</a:t>
             </a:r>
           </a:p>
           <a:p>
             <a:pPr lvl="2"/>
             <a:r>
-              <a:rPr lang="zh-TW" altLang="en-US" smtClean="0"/>
+              <a:rPr lang="zh-TW" altLang="en-US"/>
               <a:t>第三層</a:t>
             </a:r>
           </a:p>
           <a:p>
             <a:pPr lvl="3"/>
             <a:r>
-              <a:rPr lang="zh-TW" altLang="en-US" smtClean="0"/>
+              <a:rPr lang="zh-TW" altLang="en-US"/>
               <a:t>第四層</a:t>
             </a:r>
           </a:p>
           <a:p>
             <a:pPr lvl="4"/>
             <a:r>
-              <a:rPr lang="zh-TW" altLang="en-US" smtClean="0"/>
+              <a:rPr lang="zh-TW" altLang="en-US"/>
               <a:t>第五層</a:t>
             </a:r>
-            <a:endParaRPr lang="zh-TW" altLang="en-US"/>
           </a:p>
         </p:txBody>
       </p:sp>
@@ -1739,7 +1744,7 @@
           <a:p>
             <a:fld id="{6F7D173A-6F86-48C7-BA6E-5017A77567EA}" type="datetimeFigureOut">
               <a:rPr lang="zh-TW" altLang="en-US" smtClean="0"/>
-              <a:t>2019/8/3</a:t>
+              <a:t>2025/7/5</a:t>
             </a:fld>
             <a:endParaRPr lang="zh-TW" altLang="en-US"/>
           </a:p>
@@ -1828,10 +1833,9 @@
           <a:lstStyle/>
           <a:p>
             <a:r>
-              <a:rPr lang="zh-TW" altLang="en-US" smtClean="0"/>
+              <a:rPr lang="zh-TW" altLang="en-US"/>
               <a:t>按一下以編輯母片標題樣式</a:t>
             </a:r>
-            <a:endParaRPr lang="zh-TW" altLang="en-US"/>
           </a:p>
         </p:txBody>
       </p:sp>
@@ -1852,7 +1856,7 @@
           <a:p>
             <a:fld id="{6F7D173A-6F86-48C7-BA6E-5017A77567EA}" type="datetimeFigureOut">
               <a:rPr lang="zh-TW" altLang="en-US" smtClean="0"/>
-              <a:t>2019/8/3</a:t>
+              <a:t>2025/7/5</a:t>
             </a:fld>
             <a:endParaRPr lang="zh-TW" altLang="en-US"/>
           </a:p>
@@ -1942,7 +1946,7 @@
           <a:p>
             <a:fld id="{6F7D173A-6F86-48C7-BA6E-5017A77567EA}" type="datetimeFigureOut">
               <a:rPr lang="zh-TW" altLang="en-US" smtClean="0"/>
-              <a:t>2019/8/3</a:t>
+              <a:t>2025/7/5</a:t>
             </a:fld>
             <a:endParaRPr lang="zh-TW" altLang="en-US"/>
           </a:p>
@@ -2040,10 +2044,9 @@
           </a:lstStyle>
           <a:p>
             <a:r>
-              <a:rPr lang="zh-TW" altLang="en-US" smtClean="0"/>
+              <a:rPr lang="zh-TW" altLang="en-US"/>
               <a:t>按一下以編輯母片標題樣式</a:t>
             </a:r>
-            <a:endParaRPr lang="zh-TW" altLang="en-US"/>
           </a:p>
         </p:txBody>
       </p:sp>
@@ -2097,38 +2100,37 @@
           <a:p>
             <a:pPr lvl="0"/>
             <a:r>
-              <a:rPr lang="zh-TW" altLang="en-US" smtClean="0"/>
+              <a:rPr lang="zh-TW" altLang="en-US"/>
               <a:t>按一下以編輯母片文字樣式</a:t>
             </a:r>
           </a:p>
           <a:p>
             <a:pPr lvl="1"/>
             <a:r>
-              <a:rPr lang="zh-TW" altLang="en-US" smtClean="0"/>
+              <a:rPr lang="zh-TW" altLang="en-US"/>
               <a:t>第二層</a:t>
             </a:r>
           </a:p>
           <a:p>
             <a:pPr lvl="2"/>
             <a:r>
-              <a:rPr lang="zh-TW" altLang="en-US" smtClean="0"/>
+              <a:rPr lang="zh-TW" altLang="en-US"/>
               <a:t>第三層</a:t>
             </a:r>
           </a:p>
           <a:p>
             <a:pPr lvl="3"/>
             <a:r>
-              <a:rPr lang="zh-TW" altLang="en-US" smtClean="0"/>
+              <a:rPr lang="zh-TW" altLang="en-US"/>
               <a:t>第四層</a:t>
             </a:r>
           </a:p>
           <a:p>
             <a:pPr lvl="4"/>
             <a:r>
-              <a:rPr lang="zh-TW" altLang="en-US" smtClean="0"/>
+              <a:rPr lang="zh-TW" altLang="en-US"/>
               <a:t>第五層</a:t>
             </a:r>
-            <a:endParaRPr lang="zh-TW" altLang="en-US"/>
           </a:p>
         </p:txBody>
       </p:sp>
@@ -2191,7 +2193,7 @@
           <a:p>
             <a:pPr lvl="0"/>
             <a:r>
-              <a:rPr lang="zh-TW" altLang="en-US" smtClean="0"/>
+              <a:rPr lang="zh-TW" altLang="en-US"/>
               <a:t>按一下以編輯母片文字樣式</a:t>
             </a:r>
           </a:p>
@@ -2214,7 +2216,7 @@
           <a:p>
             <a:fld id="{6F7D173A-6F86-48C7-BA6E-5017A77567EA}" type="datetimeFigureOut">
               <a:rPr lang="zh-TW" altLang="en-US" smtClean="0"/>
-              <a:t>2019/8/3</a:t>
+              <a:t>2025/7/5</a:t>
             </a:fld>
             <a:endParaRPr lang="zh-TW" altLang="en-US"/>
           </a:p>
@@ -2312,10 +2314,9 @@
           </a:lstStyle>
           <a:p>
             <a:r>
-              <a:rPr lang="zh-TW" altLang="en-US" smtClean="0"/>
+              <a:rPr lang="zh-TW" altLang="en-US"/>
               <a:t>按一下以編輯母片標題樣式</a:t>
             </a:r>
-            <a:endParaRPr lang="zh-TW" altLang="en-US"/>
           </a:p>
         </p:txBody>
       </p:sp>
@@ -2377,10 +2378,9 @@
           </a:lstStyle>
           <a:p>
             <a:r>
-              <a:rPr lang="zh-TW" altLang="en-US" smtClean="0"/>
+              <a:rPr lang="zh-TW" altLang="en-US"/>
               <a:t>按一下圖示以新增圖片</a:t>
             </a:r>
-            <a:endParaRPr lang="zh-TW" altLang="en-US"/>
           </a:p>
         </p:txBody>
       </p:sp>
@@ -2443,7 +2443,7 @@
           <a:p>
             <a:pPr lvl="0"/>
             <a:r>
-              <a:rPr lang="zh-TW" altLang="en-US" smtClean="0"/>
+              <a:rPr lang="zh-TW" altLang="en-US"/>
               <a:t>按一下以編輯母片文字樣式</a:t>
             </a:r>
           </a:p>
@@ -2466,7 +2466,7 @@
           <a:p>
             <a:fld id="{6F7D173A-6F86-48C7-BA6E-5017A77567EA}" type="datetimeFigureOut">
               <a:rPr lang="zh-TW" altLang="en-US" smtClean="0"/>
-              <a:t>2019/8/3</a:t>
+              <a:t>2025/7/5</a:t>
             </a:fld>
             <a:endParaRPr lang="zh-TW" altLang="en-US"/>
           </a:p>
@@ -2575,10 +2575,9 @@
           <a:lstStyle/>
           <a:p>
             <a:r>
-              <a:rPr lang="zh-TW" altLang="en-US" smtClean="0"/>
+              <a:rPr lang="zh-TW" altLang="en-US"/>
               <a:t>按一下以編輯母片標題樣式</a:t>
             </a:r>
-            <a:endParaRPr lang="zh-TW" altLang="en-US"/>
           </a:p>
         </p:txBody>
       </p:sp>
@@ -2609,38 +2608,37 @@
           <a:p>
             <a:pPr lvl="0"/>
             <a:r>
-              <a:rPr lang="zh-TW" altLang="en-US" smtClean="0"/>
+              <a:rPr lang="zh-TW" altLang="en-US"/>
               <a:t>按一下以編輯母片文字樣式</a:t>
             </a:r>
           </a:p>
           <a:p>
             <a:pPr lvl="1"/>
             <a:r>
-              <a:rPr lang="zh-TW" altLang="en-US" smtClean="0"/>
+              <a:rPr lang="zh-TW" altLang="en-US"/>
               <a:t>第二層</a:t>
             </a:r>
           </a:p>
           <a:p>
             <a:pPr lvl="2"/>
             <a:r>
-              <a:rPr lang="zh-TW" altLang="en-US" smtClean="0"/>
+              <a:rPr lang="zh-TW" altLang="en-US"/>
               <a:t>第三層</a:t>
             </a:r>
           </a:p>
           <a:p>
             <a:pPr lvl="3"/>
             <a:r>
-              <a:rPr lang="zh-TW" altLang="en-US" smtClean="0"/>
+              <a:rPr lang="zh-TW" altLang="en-US"/>
               <a:t>第四層</a:t>
             </a:r>
           </a:p>
           <a:p>
             <a:pPr lvl="4"/>
             <a:r>
-              <a:rPr lang="zh-TW" altLang="en-US" smtClean="0"/>
+              <a:rPr lang="zh-TW" altLang="en-US"/>
               <a:t>第五層</a:t>
             </a:r>
-            <a:endParaRPr lang="zh-TW" altLang="en-US"/>
           </a:p>
         </p:txBody>
       </p:sp>
@@ -2679,7 +2677,7 @@
           <a:p>
             <a:fld id="{6F7D173A-6F86-48C7-BA6E-5017A77567EA}" type="datetimeFigureOut">
               <a:rPr lang="zh-TW" altLang="en-US" smtClean="0"/>
-              <a:t>2019/8/3</a:t>
+              <a:t>2025/7/5</a:t>
             </a:fld>
             <a:endParaRPr lang="zh-TW" altLang="en-US"/>
           </a:p>
@@ -3059,110 +3057,153 @@
             <p:ph type="title"/>
           </p:nvPr>
         </p:nvSpPr>
-        <p:spPr/>
+        <p:spPr>
+          <a:xfrm>
+            <a:off x="0" y="1995686"/>
+            <a:ext cx="9144000" cy="857250"/>
+          </a:xfrm>
+        </p:spPr>
         <p:txBody>
           <a:bodyPr>
-            <a:normAutofit/>
+            <a:noAutofit/>
           </a:bodyPr>
           <a:lstStyle/>
           <a:p>
             <a:r>
-              <a:rPr lang="zh-TW" altLang="en-US" sz="4000" b="1" dirty="0" smtClean="0">
-                <a:solidFill>
-                  <a:srgbClr val="000066"/>
-                </a:solidFill>
+              <a:rPr lang="zh-CN" altLang="en-US" sz="4000" b="1" u="sng" dirty="0">
+                <a:solidFill>
+                  <a:srgbClr val="660033"/>
+                </a:solidFill>
+                <a:effectLst>
+                  <a:outerShdw blurRad="38100" dist="38100" dir="2700000" algn="tl">
+                    <a:srgbClr val="000000">
+                      <a:alpha val="43137"/>
+                    </a:srgbClr>
+                  </a:outerShdw>
+                </a:effectLst>
                 <a:latin typeface="微軟正黑體" pitchFamily="34" charset="-120"/>
                 <a:ea typeface="微軟正黑體" pitchFamily="34" charset="-120"/>
               </a:rPr>
-              <a:t>你真偉大</a:t>
-            </a:r>
-            <a:endParaRPr lang="zh-TW" altLang="en-US" sz="4000" b="1" dirty="0">
-              <a:solidFill>
-                <a:srgbClr val="000066"/>
-              </a:solidFill>
-              <a:latin typeface="微軟正黑體" pitchFamily="34" charset="-120"/>
-              <a:ea typeface="微軟正黑體" pitchFamily="34" charset="-120"/>
-            </a:endParaRPr>
-          </a:p>
-        </p:txBody>
-      </p:sp>
-      <p:sp>
-        <p:nvSpPr>
-          <p:cNvPr id="5" name="內容版面配置區 4"/>
-          <p:cNvSpPr>
-            <a:spLocks noGrp="1"/>
-          </p:cNvSpPr>
-          <p:nvPr>
-            <p:ph idx="1"/>
-          </p:nvPr>
-        </p:nvSpPr>
-        <p:spPr>
-          <a:xfrm>
-            <a:off x="0" y="1200151"/>
-            <a:ext cx="9144000" cy="3394472"/>
-          </a:xfrm>
-        </p:spPr>
-        <p:txBody>
-          <a:bodyPr>
-            <a:noAutofit/>
-          </a:bodyPr>
-          <a:lstStyle/>
-          <a:p>
-            <a:pPr algn="ctr">
-              <a:buNone/>
-            </a:pPr>
-            <a:r>
-              <a:rPr lang="zh-TW" altLang="en-US" sz="4800" b="1" dirty="0" smtClean="0">
-                <a:solidFill>
-                  <a:srgbClr val="000066"/>
-                </a:solidFill>
+              <a:t>生命聖詩 </a:t>
+            </a:r>
+            <a:r>
+              <a:rPr lang="en-US" altLang="zh-CN" sz="4000" b="1" u="sng" dirty="0">
+                <a:solidFill>
+                  <a:srgbClr val="660033"/>
+                </a:solidFill>
+                <a:effectLst>
+                  <a:outerShdw blurRad="38100" dist="38100" dir="2700000" algn="tl">
+                    <a:srgbClr val="000000">
+                      <a:alpha val="43137"/>
+                    </a:srgbClr>
+                  </a:outerShdw>
+                </a:effectLst>
                 <a:latin typeface="微軟正黑體" pitchFamily="34" charset="-120"/>
                 <a:ea typeface="微軟正黑體" pitchFamily="34" charset="-120"/>
               </a:rPr>
-              <a:t>主</a:t>
-            </a:r>
-            <a:r>
-              <a:rPr lang="zh-TW" altLang="en-US" sz="4800" b="1" dirty="0">
-                <a:solidFill>
-                  <a:srgbClr val="000066"/>
-                </a:solidFill>
+              <a:t>12</a:t>
+            </a:r>
+            <a:br>
+              <a:rPr lang="en-US" altLang="zh-CN" sz="5400" b="1" i="1" dirty="0">
+                <a:solidFill>
+                  <a:srgbClr val="660033"/>
+                </a:solidFill>
+                <a:effectLst>
+                  <a:outerShdw blurRad="38100" dist="38100" dir="2700000" algn="tl">
+                    <a:srgbClr val="000000">
+                      <a:alpha val="43137"/>
+                    </a:srgbClr>
+                  </a:outerShdw>
+                </a:effectLst>
                 <a:latin typeface="微軟正黑體" pitchFamily="34" charset="-120"/>
                 <a:ea typeface="微軟正黑體" pitchFamily="34" charset="-120"/>
               </a:rPr>
-              <a:t>阿  我神  我每逢舉目觀看</a:t>
-            </a:r>
-            <a:endParaRPr lang="en-US" altLang="zh-TW" sz="4800" b="1" dirty="0">
-              <a:solidFill>
-                <a:srgbClr val="000066"/>
-              </a:solidFill>
-              <a:latin typeface="微軟正黑體" pitchFamily="34" charset="-120"/>
-              <a:ea typeface="微軟正黑體" pitchFamily="34" charset="-120"/>
-            </a:endParaRPr>
-          </a:p>
-          <a:p>
-            <a:pPr algn="ctr">
-              <a:buNone/>
-            </a:pPr>
-            <a:r>
-              <a:rPr lang="zh-TW" altLang="en-US" sz="4800" b="1" dirty="0">
+            </a:br>
+            <a:r>
+              <a:rPr lang="zh-TW" altLang="en-US" sz="6000" b="1" dirty="0">
                 <a:solidFill>
                   <a:srgbClr val="000066"/>
                 </a:solidFill>
+                <a:effectLst>
+                  <a:outerShdw blurRad="38100" dist="38100" dir="2700000" algn="tl">
+                    <a:srgbClr val="000000">
+                      <a:alpha val="43137"/>
+                    </a:srgbClr>
+                  </a:outerShdw>
+                </a:effectLst>
                 <a:latin typeface="微軟正黑體" pitchFamily="34" charset="-120"/>
                 <a:ea typeface="微軟正黑體" pitchFamily="34" charset="-120"/>
               </a:rPr>
-              <a:t>你手所造一切奇妙大工</a:t>
-            </a:r>
-            <a:endParaRPr lang="en-US" altLang="zh-TW" sz="4800" b="1" dirty="0">
-              <a:solidFill>
-                <a:srgbClr val="000066"/>
-              </a:solidFill>
-              <a:latin typeface="微軟正黑體" pitchFamily="34" charset="-120"/>
-              <a:ea typeface="微軟正黑體" pitchFamily="34" charset="-120"/>
-            </a:endParaRPr>
-          </a:p>
-          <a:p>
-            <a:pPr algn="ctr">
+              <a:t>祢真偉大</a:t>
+            </a:r>
+          </a:p>
+        </p:txBody>
+      </p:sp>
+    </p:spTree>
+    <p:extLst>
+      <p:ext uri="{BB962C8B-B14F-4D97-AF65-F5344CB8AC3E}">
+        <p14:creationId xmlns:p14="http://schemas.microsoft.com/office/powerpoint/2010/main" val="3724263107"/>
+      </p:ext>
+    </p:extLst>
+  </p:cSld>
+  <p:clrMapOvr>
+    <a:masterClrMapping/>
+  </p:clrMapOvr>
+</p:sld>
+</file>
+
+<file path=ppt/slides/slide10.xml><?xml version="1.0" encoding="utf-8"?>
+<p:sld xmlns:a="http://schemas.openxmlformats.org/drawingml/2006/main" xmlns:r="http://schemas.openxmlformats.org/officeDocument/2006/relationships" xmlns:p="http://schemas.openxmlformats.org/presentationml/2006/main">
+  <p:cSld>
+    <p:spTree>
+      <p:nvGrpSpPr>
+        <p:cNvPr id="1" name="">
+          <a:extLst>
+            <a:ext uri="{FF2B5EF4-FFF2-40B4-BE49-F238E27FC236}">
+              <a16:creationId xmlns:a16="http://schemas.microsoft.com/office/drawing/2014/main" id="{7B97B617-1B10-9D73-FBD8-A9D835896816}"/>
+            </a:ext>
+          </a:extLst>
+        </p:cNvPr>
+        <p:cNvGrpSpPr/>
+        <p:nvPr/>
+      </p:nvGrpSpPr>
+      <p:grpSpPr>
+        <a:xfrm>
+          <a:off x="0" y="0"/>
+          <a:ext cx="0" cy="0"/>
+          <a:chOff x="0" y="0"/>
+          <a:chExt cx="0" cy="0"/>
+        </a:xfrm>
+      </p:grpSpPr>
+      <p:sp>
+        <p:nvSpPr>
+          <p:cNvPr id="5" name="內容版面配置區 4">
+            <a:extLst>
+              <a:ext uri="{FF2B5EF4-FFF2-40B4-BE49-F238E27FC236}">
+                <a16:creationId xmlns:a16="http://schemas.microsoft.com/office/drawing/2014/main" id="{1E5D14A6-8B3A-867F-0C97-CC417DDAB228}"/>
+              </a:ext>
+            </a:extLst>
+          </p:cNvPr>
+          <p:cNvSpPr>
+            <a:spLocks noGrp="1"/>
+          </p:cNvSpPr>
+          <p:nvPr>
+            <p:ph idx="1"/>
+          </p:nvPr>
+        </p:nvSpPr>
+        <p:spPr>
+          <a:xfrm>
+            <a:off x="0" y="1563639"/>
+            <a:ext cx="9144000" cy="1803647"/>
+          </a:xfrm>
+        </p:spPr>
+        <p:txBody>
+          <a:bodyPr anchor="ctr">
+            <a:normAutofit/>
+          </a:bodyPr>
+          <a:lstStyle/>
+          <a:p>
+            <a:pPr marL="0" indent="0" algn="ctr">
               <a:buNone/>
             </a:pPr>
             <a:r>
@@ -3170,21 +3211,14 @@
                 <a:solidFill>
                   <a:srgbClr val="000066"/>
                 </a:solidFill>
-                <a:latin typeface="微軟正黑體" pitchFamily="34" charset="-120"/>
-                <a:ea typeface="微軟正黑體" pitchFamily="34" charset="-120"/>
+                <a:latin typeface="Microsoft JhengHei" pitchFamily="34" charset="-120"/>
+                <a:ea typeface="Microsoft JhengHei" pitchFamily="34" charset="-120"/>
               </a:rPr>
-              <a:t>看見星宿  又聽到隆隆雷聲</a:t>
-            </a:r>
-            <a:endParaRPr lang="en-US" altLang="zh-TW" sz="4800" b="1" dirty="0">
-              <a:solidFill>
-                <a:srgbClr val="000066"/>
-              </a:solidFill>
-              <a:latin typeface="微軟正黑體" pitchFamily="34" charset="-120"/>
-              <a:ea typeface="微軟正黑體" pitchFamily="34" charset="-120"/>
-            </a:endParaRPr>
-          </a:p>
-          <a:p>
-            <a:pPr algn="ctr">
+              <a:t>我靈歌唱  讚美救主我神</a:t>
+            </a:r>
+          </a:p>
+          <a:p>
+            <a:pPr marL="0" indent="0" algn="ctr">
               <a:buNone/>
             </a:pPr>
             <a:r>
@@ -3192,31 +3226,30 @@
                 <a:solidFill>
                   <a:srgbClr val="000066"/>
                 </a:solidFill>
-                <a:latin typeface="微軟正黑體" pitchFamily="34" charset="-120"/>
-                <a:ea typeface="微軟正黑體" pitchFamily="34" charset="-120"/>
+                <a:latin typeface="Microsoft JhengHei" pitchFamily="34" charset="-120"/>
+                <a:ea typeface="Microsoft JhengHei" pitchFamily="34" charset="-120"/>
               </a:rPr>
-              <a:t>你的大能遍滿了宇宙中</a:t>
-            </a:r>
-            <a:endParaRPr lang="zh-TW" altLang="en-US" sz="4800" b="1" dirty="0">
-              <a:solidFill>
-                <a:srgbClr val="000066"/>
-              </a:solidFill>
-              <a:latin typeface="微軟正黑體" pitchFamily="34" charset="-120"/>
-              <a:ea typeface="微軟正黑體" pitchFamily="34" charset="-120"/>
-            </a:endParaRPr>
-          </a:p>
-        </p:txBody>
-      </p:sp>
-      <p:sp>
-        <p:nvSpPr>
-          <p:cNvPr id="6" name="TextBox 5"/>
+              <a:t>祢真偉大  何等偉大</a:t>
+            </a:r>
+          </a:p>
+        </p:txBody>
+      </p:sp>
+      <p:sp>
+        <p:nvSpPr>
+          <p:cNvPr id="2" name="TextBox 1">
+            <a:extLst>
+              <a:ext uri="{FF2B5EF4-FFF2-40B4-BE49-F238E27FC236}">
+                <a16:creationId xmlns:a16="http://schemas.microsoft.com/office/drawing/2014/main" id="{D8EED16B-0C02-ED47-8BEE-1579C4DB0397}"/>
+              </a:ext>
+            </a:extLst>
+          </p:cNvPr>
           <p:cNvSpPr txBox="1"/>
           <p:nvPr/>
         </p:nvSpPr>
         <p:spPr>
           <a:xfrm>
-            <a:off x="179512" y="1203598"/>
-            <a:ext cx="720080" cy="830997"/>
+            <a:off x="0" y="3795887"/>
+            <a:ext cx="9144000" cy="523220"/>
           </a:xfrm>
           <a:prstGeom prst="rect">
             <a:avLst/>
@@ -3229,23 +3262,62 @@
           </a:bodyPr>
           <a:lstStyle/>
           <a:p>
-            <a:r>
-              <a:rPr lang="en-US" altLang="zh-CN" sz="4800" b="1" dirty="0" smtClean="0">
+            <a:pPr algn="ctr"/>
+            <a:r>
+              <a:rPr lang="en-US" sz="2800" b="1" dirty="0">
                 <a:solidFill>
                   <a:srgbClr val="000066"/>
                 </a:solidFill>
+                <a:latin typeface="Microsoft JhengHei" pitchFamily="34" charset="-120"/>
+                <a:ea typeface="Microsoft JhengHei" pitchFamily="34" charset="-120"/>
               </a:rPr>
-              <a:t>1.</a:t>
-            </a:r>
-            <a:endParaRPr lang="en-US" sz="4800" b="1" dirty="0">
+              <a:t>( 2 </a:t>
+            </a:r>
+            <a:r>
+              <a:rPr lang="zh-CN" altLang="en-US" sz="2800" b="1" dirty="0">
+                <a:solidFill>
+                  <a:srgbClr val="000066"/>
+                </a:solidFill>
+                <a:latin typeface="Microsoft JhengHei" pitchFamily="34" charset="-120"/>
+                <a:ea typeface="Microsoft JhengHei" pitchFamily="34" charset="-120"/>
+              </a:rPr>
+              <a:t>次</a:t>
+            </a:r>
+            <a:r>
+              <a:rPr lang="en-US" altLang="zh-CN" sz="2800" b="1" dirty="0">
+                <a:solidFill>
+                  <a:srgbClr val="000066"/>
+                </a:solidFill>
+                <a:latin typeface="Microsoft JhengHei" pitchFamily="34" charset="-120"/>
+                <a:ea typeface="Microsoft JhengHei" pitchFamily="34" charset="-120"/>
+              </a:rPr>
+              <a:t> </a:t>
+            </a:r>
+            <a:r>
+              <a:rPr lang="en-US" sz="2800" b="1" dirty="0">
+                <a:solidFill>
+                  <a:srgbClr val="000066"/>
+                </a:solidFill>
+                <a:latin typeface="Microsoft JhengHei" pitchFamily="34" charset="-120"/>
+                <a:ea typeface="Microsoft JhengHei" pitchFamily="34" charset="-120"/>
+              </a:rPr>
+              <a:t>)</a:t>
+            </a:r>
+            <a:endParaRPr lang="vi-VN" sz="2800" b="1" dirty="0">
               <a:solidFill>
                 <a:srgbClr val="000066"/>
               </a:solidFill>
+              <a:ea typeface="Microsoft JhengHei" pitchFamily="34" charset="-120"/>
             </a:endParaRPr>
           </a:p>
         </p:txBody>
       </p:sp>
     </p:spTree>
+    <p:extLst>
+      <p:ext uri="{BB962C8B-B14F-4D97-AF65-F5344CB8AC3E}">
+        <p14:creationId xmlns:p14="http://schemas.microsoft.com/office/powerpoint/2010/main" val="218584105"/>
+      </p:ext>
+    </p:extLst>
   </p:cSld>
   <p:clrMapOvr>
     <a:masterClrMapping/>
@@ -3272,139 +3344,102 @@
       </p:grpSpPr>
       <p:sp>
         <p:nvSpPr>
-          <p:cNvPr id="4" name="標題 3"/>
-          <p:cNvSpPr>
-            <a:spLocks noGrp="1"/>
-          </p:cNvSpPr>
-          <p:nvPr>
-            <p:ph type="title"/>
-          </p:nvPr>
-        </p:nvSpPr>
-        <p:spPr/>
-        <p:txBody>
-          <a:bodyPr>
+          <p:cNvPr id="5" name="內容版面配置區 4"/>
+          <p:cNvSpPr>
+            <a:spLocks noGrp="1"/>
+          </p:cNvSpPr>
+          <p:nvPr>
+            <p:ph idx="1"/>
+          </p:nvPr>
+        </p:nvSpPr>
+        <p:spPr>
+          <a:xfrm>
+            <a:off x="0" y="1563639"/>
+            <a:ext cx="9144000" cy="1803647"/>
+          </a:xfrm>
+        </p:spPr>
+        <p:txBody>
+          <a:bodyPr anchor="ctr">
             <a:normAutofit/>
           </a:bodyPr>
           <a:lstStyle/>
           <a:p>
-            <a:r>
-              <a:rPr lang="zh-TW" altLang="en-US" sz="4000" b="1" dirty="0">
+            <a:pPr marL="0" indent="0" algn="ctr">
+              <a:buNone/>
+            </a:pPr>
+            <a:r>
+              <a:rPr lang="zh-TW" altLang="en-US" sz="4800" b="1" dirty="0">
                 <a:solidFill>
                   <a:srgbClr val="000066"/>
                 </a:solidFill>
-                <a:latin typeface="微軟正黑體" pitchFamily="34" charset="-120"/>
-                <a:ea typeface="微軟正黑體" pitchFamily="34" charset="-120"/>
+                <a:latin typeface="Microsoft JhengHei" pitchFamily="34" charset="-120"/>
+                <a:ea typeface="Microsoft JhengHei" pitchFamily="34" charset="-120"/>
               </a:rPr>
-              <a:t>你真偉大</a:t>
-            </a:r>
-          </a:p>
-        </p:txBody>
-      </p:sp>
-      <p:sp>
-        <p:nvSpPr>
-          <p:cNvPr id="5" name="內容版面配置區 4"/>
-          <p:cNvSpPr>
-            <a:spLocks noGrp="1"/>
-          </p:cNvSpPr>
-          <p:nvPr>
-            <p:ph idx="1"/>
-          </p:nvPr>
+              <a:t>主阿  我神  我每逢舉目觀看</a:t>
+            </a:r>
+          </a:p>
+          <a:p>
+            <a:pPr marL="0" indent="0" algn="ctr">
+              <a:buNone/>
+            </a:pPr>
+            <a:r>
+              <a:rPr lang="zh-TW" altLang="en-US" sz="4800" b="1" dirty="0">
+                <a:solidFill>
+                  <a:srgbClr val="000066"/>
+                </a:solidFill>
+                <a:latin typeface="Microsoft JhengHei" pitchFamily="34" charset="-120"/>
+                <a:ea typeface="Microsoft JhengHei" pitchFamily="34" charset="-120"/>
+              </a:rPr>
+              <a:t>祢手所造一切奇妙大工</a:t>
+            </a:r>
+          </a:p>
+        </p:txBody>
+      </p:sp>
+      <p:sp>
+        <p:nvSpPr>
+          <p:cNvPr id="3" name="TextBox 2"/>
+          <p:cNvSpPr txBox="1"/>
+          <p:nvPr/>
         </p:nvSpPr>
         <p:spPr>
           <a:xfrm>
-            <a:off x="0" y="1200151"/>
-            <a:ext cx="9144000" cy="3394472"/>
+            <a:off x="0" y="3795887"/>
+            <a:ext cx="9144000" cy="523220"/>
           </a:xfrm>
+          <a:prstGeom prst="rect">
+            <a:avLst/>
+          </a:prstGeom>
+          <a:noFill/>
         </p:spPr>
         <p:txBody>
-          <a:bodyPr>
-            <a:noAutofit/>
+          <a:bodyPr wrap="square" rtlCol="0">
+            <a:spAutoFit/>
           </a:bodyPr>
           <a:lstStyle/>
           <a:p>
-            <a:pPr algn="ctr">
-              <a:buNone/>
-            </a:pPr>
-            <a:r>
-              <a:rPr lang="zh-TW" altLang="en-US" sz="4800" b="1" dirty="0">
+            <a:pPr algn="ctr"/>
+            <a:r>
+              <a:rPr lang="en-US" sz="2800" b="1" dirty="0">
                 <a:solidFill>
                   <a:srgbClr val="000066"/>
                 </a:solidFill>
-                <a:latin typeface="微軟正黑體" pitchFamily="34" charset="-120"/>
-                <a:ea typeface="微軟正黑體" pitchFamily="34" charset="-120"/>
               </a:rPr>
-              <a:t>我靈歌唱  讚美救主我神</a:t>
-            </a:r>
-            <a:endParaRPr lang="en-US" altLang="zh-TW" sz="4800" b="1" dirty="0">
+              <a:t>( 1 / 3 )</a:t>
+            </a:r>
+            <a:endParaRPr lang="vi-VN" sz="2800" b="1" dirty="0">
               <a:solidFill>
                 <a:srgbClr val="000066"/>
               </a:solidFill>
-              <a:latin typeface="微軟正黑體" pitchFamily="34" charset="-120"/>
-              <a:ea typeface="微軟正黑體" pitchFamily="34" charset="-120"/>
             </a:endParaRPr>
           </a:p>
-          <a:p>
-            <a:pPr algn="ctr">
-              <a:buNone/>
-            </a:pPr>
-            <a:r>
-              <a:rPr lang="zh-TW" altLang="en-US" sz="4800" b="1" dirty="0">
-                <a:solidFill>
-                  <a:srgbClr val="000066"/>
-                </a:solidFill>
-                <a:latin typeface="微軟正黑體" pitchFamily="34" charset="-120"/>
-                <a:ea typeface="微軟正黑體" pitchFamily="34" charset="-120"/>
-              </a:rPr>
-              <a:t>你真偉大  何等偉大</a:t>
-            </a:r>
-            <a:endParaRPr lang="en-US" altLang="zh-TW" sz="4800" b="1" dirty="0">
-              <a:solidFill>
-                <a:srgbClr val="000066"/>
-              </a:solidFill>
-              <a:latin typeface="微軟正黑體" pitchFamily="34" charset="-120"/>
-              <a:ea typeface="微軟正黑體" pitchFamily="34" charset="-120"/>
-            </a:endParaRPr>
-          </a:p>
-          <a:p>
-            <a:pPr algn="ctr">
-              <a:buNone/>
-            </a:pPr>
-            <a:r>
-              <a:rPr lang="zh-TW" altLang="en-US" sz="4800" b="1" dirty="0">
-                <a:solidFill>
-                  <a:srgbClr val="000066"/>
-                </a:solidFill>
-                <a:latin typeface="微軟正黑體" pitchFamily="34" charset="-120"/>
-                <a:ea typeface="微軟正黑體" pitchFamily="34" charset="-120"/>
-              </a:rPr>
-              <a:t>我靈歌唱  讚美救主我神</a:t>
-            </a:r>
-            <a:endParaRPr lang="en-US" altLang="zh-TW" sz="4800" b="1" dirty="0">
-              <a:solidFill>
-                <a:srgbClr val="000066"/>
-              </a:solidFill>
-              <a:latin typeface="微軟正黑體" pitchFamily="34" charset="-120"/>
-              <a:ea typeface="微軟正黑體" pitchFamily="34" charset="-120"/>
-            </a:endParaRPr>
-          </a:p>
-          <a:p>
-            <a:pPr algn="ctr">
-              <a:buNone/>
-            </a:pPr>
-            <a:r>
-              <a:rPr lang="zh-TW" altLang="en-US" sz="4800" b="1" dirty="0">
-                <a:solidFill>
-                  <a:srgbClr val="000066"/>
-                </a:solidFill>
-                <a:latin typeface="微軟正黑體" pitchFamily="34" charset="-120"/>
-                <a:ea typeface="微軟正黑體" pitchFamily="34" charset="-120"/>
-              </a:rPr>
-              <a:t>你真偉大  何等偉大</a:t>
-            </a:r>
-          </a:p>
         </p:txBody>
       </p:sp>
     </p:spTree>
+    <p:extLst>
+      <p:ext uri="{BB962C8B-B14F-4D97-AF65-F5344CB8AC3E}">
+        <p14:creationId xmlns:p14="http://schemas.microsoft.com/office/powerpoint/2010/main" val="1407003638"/>
+      </p:ext>
+    </p:extLst>
   </p:cSld>
   <p:clrMapOvr>
     <a:masterClrMapping/>
@@ -3417,7 +3452,13 @@
   <p:cSld>
     <p:spTree>
       <p:nvGrpSpPr>
-        <p:cNvPr id="1" name=""/>
+        <p:cNvPr id="1" name="">
+          <a:extLst>
+            <a:ext uri="{FF2B5EF4-FFF2-40B4-BE49-F238E27FC236}">
+              <a16:creationId xmlns:a16="http://schemas.microsoft.com/office/drawing/2014/main" id="{D8FF720A-BE62-414E-964E-46833F169300}"/>
+            </a:ext>
+          </a:extLst>
+        </p:cNvPr>
         <p:cNvGrpSpPr/>
         <p:nvPr/>
       </p:nvGrpSpPr>
@@ -3431,155 +3472,79 @@
       </p:grpSpPr>
       <p:sp>
         <p:nvSpPr>
-          <p:cNvPr id="4" name="標題 3"/>
-          <p:cNvSpPr>
-            <a:spLocks noGrp="1"/>
-          </p:cNvSpPr>
-          <p:nvPr>
-            <p:ph type="title"/>
-          </p:nvPr>
-        </p:nvSpPr>
-        <p:spPr/>
-        <p:txBody>
-          <a:bodyPr>
+          <p:cNvPr id="5" name="內容版面配置區 4">
+            <a:extLst>
+              <a:ext uri="{FF2B5EF4-FFF2-40B4-BE49-F238E27FC236}">
+                <a16:creationId xmlns:a16="http://schemas.microsoft.com/office/drawing/2014/main" id="{0BF0541D-3A9D-6DBA-8640-53DAEB385CE2}"/>
+              </a:ext>
+            </a:extLst>
+          </p:cNvPr>
+          <p:cNvSpPr>
+            <a:spLocks noGrp="1"/>
+          </p:cNvSpPr>
+          <p:nvPr>
+            <p:ph idx="1"/>
+          </p:nvPr>
+        </p:nvSpPr>
+        <p:spPr>
+          <a:xfrm>
+            <a:off x="0" y="1563639"/>
+            <a:ext cx="9144000" cy="1803647"/>
+          </a:xfrm>
+        </p:spPr>
+        <p:txBody>
+          <a:bodyPr anchor="ctr">
             <a:normAutofit/>
           </a:bodyPr>
           <a:lstStyle/>
           <a:p>
-            <a:r>
-              <a:rPr lang="zh-TW" altLang="en-US" sz="4000" b="1" dirty="0">
+            <a:pPr marL="0" indent="0" algn="ctr">
+              <a:buNone/>
+            </a:pPr>
+            <a:r>
+              <a:rPr lang="zh-TW" altLang="en-US" sz="4800" b="1" dirty="0">
                 <a:solidFill>
                   <a:srgbClr val="000066"/>
                 </a:solidFill>
-                <a:latin typeface="微軟正黑體" pitchFamily="34" charset="-120"/>
-                <a:ea typeface="微軟正黑體" pitchFamily="34" charset="-120"/>
+                <a:latin typeface="Microsoft JhengHei" pitchFamily="34" charset="-120"/>
+                <a:ea typeface="Microsoft JhengHei" pitchFamily="34" charset="-120"/>
               </a:rPr>
-              <a:t>你真偉大</a:t>
-            </a:r>
-            <a:endParaRPr lang="zh-TW" altLang="en-US" sz="4000" b="1" dirty="0">
-              <a:solidFill>
-                <a:srgbClr val="000066"/>
-              </a:solidFill>
-              <a:latin typeface="微軟正黑體" pitchFamily="34" charset="-120"/>
-              <a:ea typeface="微軟正黑體" pitchFamily="34" charset="-120"/>
-            </a:endParaRPr>
-          </a:p>
-        </p:txBody>
-      </p:sp>
-      <p:sp>
-        <p:nvSpPr>
-          <p:cNvPr id="5" name="內容版面配置區 4"/>
-          <p:cNvSpPr>
-            <a:spLocks noGrp="1"/>
-          </p:cNvSpPr>
-          <p:nvPr>
-            <p:ph idx="1"/>
-          </p:nvPr>
+              <a:t>看見星宿  又聽到隆隆雷聲</a:t>
+            </a:r>
+          </a:p>
+          <a:p>
+            <a:pPr marL="0" indent="0" algn="ctr">
+              <a:buNone/>
+            </a:pPr>
+            <a:r>
+              <a:rPr lang="zh-TW" altLang="en-US" sz="4800" b="1" dirty="0">
+                <a:solidFill>
+                  <a:srgbClr val="000066"/>
+                </a:solidFill>
+                <a:latin typeface="Microsoft JhengHei" pitchFamily="34" charset="-120"/>
+                <a:ea typeface="Microsoft JhengHei" pitchFamily="34" charset="-120"/>
+              </a:rPr>
+              <a:t>祢的大能遍滿了宇宙中</a:t>
+            </a:r>
+          </a:p>
+        </p:txBody>
+      </p:sp>
+      <p:sp>
+        <p:nvSpPr>
+          <p:cNvPr id="3" name="TextBox 2">
+            <a:extLst>
+              <a:ext uri="{FF2B5EF4-FFF2-40B4-BE49-F238E27FC236}">
+                <a16:creationId xmlns:a16="http://schemas.microsoft.com/office/drawing/2014/main" id="{E271DA6A-74EC-D420-BC70-90E88F83E2A5}"/>
+              </a:ext>
+            </a:extLst>
+          </p:cNvPr>
+          <p:cNvSpPr txBox="1"/>
+          <p:nvPr/>
         </p:nvSpPr>
         <p:spPr>
           <a:xfrm>
-            <a:off x="0" y="1200151"/>
-            <a:ext cx="9144000" cy="3394472"/>
-          </a:xfrm>
-        </p:spPr>
-        <p:txBody>
-          <a:bodyPr>
-            <a:noAutofit/>
-          </a:bodyPr>
-          <a:lstStyle/>
-          <a:p>
-            <a:pPr algn="ctr">
-              <a:buNone/>
-            </a:pPr>
-            <a:r>
-              <a:rPr lang="zh-TW" altLang="en-US" sz="4800" b="1" dirty="0">
-                <a:solidFill>
-                  <a:srgbClr val="000066"/>
-                </a:solidFill>
-                <a:latin typeface="微軟正黑體" pitchFamily="34" charset="-120"/>
-                <a:ea typeface="微軟正黑體" pitchFamily="34" charset="-120"/>
-              </a:rPr>
-              <a:t>當我想到  神竟願差祂兒子</a:t>
-            </a:r>
-            <a:endParaRPr lang="en-US" altLang="zh-TW" sz="4800" b="1" dirty="0">
-              <a:solidFill>
-                <a:srgbClr val="000066"/>
-              </a:solidFill>
-              <a:latin typeface="微軟正黑體" pitchFamily="34" charset="-120"/>
-              <a:ea typeface="微軟正黑體" pitchFamily="34" charset="-120"/>
-            </a:endParaRPr>
-          </a:p>
-          <a:p>
-            <a:pPr algn="ctr">
-              <a:buNone/>
-            </a:pPr>
-            <a:r>
-              <a:rPr lang="zh-TW" altLang="en-US" sz="4800" b="1" dirty="0">
-                <a:solidFill>
-                  <a:srgbClr val="000066"/>
-                </a:solidFill>
-                <a:latin typeface="微軟正黑體" pitchFamily="34" charset="-120"/>
-                <a:ea typeface="微軟正黑體" pitchFamily="34" charset="-120"/>
-              </a:rPr>
-              <a:t>降世捨命  我幾乎不領會</a:t>
-            </a:r>
-            <a:endParaRPr lang="en-US" altLang="zh-TW" sz="4800" b="1" dirty="0">
-              <a:solidFill>
-                <a:srgbClr val="000066"/>
-              </a:solidFill>
-              <a:latin typeface="微軟正黑體" pitchFamily="34" charset="-120"/>
-              <a:ea typeface="微軟正黑體" pitchFamily="34" charset="-120"/>
-            </a:endParaRPr>
-          </a:p>
-          <a:p>
-            <a:pPr algn="ctr">
-              <a:buNone/>
-            </a:pPr>
-            <a:r>
-              <a:rPr lang="zh-TW" altLang="en-US" sz="4800" b="1" dirty="0">
-                <a:solidFill>
-                  <a:srgbClr val="000066"/>
-                </a:solidFill>
-                <a:latin typeface="微軟正黑體" pitchFamily="34" charset="-120"/>
-                <a:ea typeface="微軟正黑體" pitchFamily="34" charset="-120"/>
-              </a:rPr>
-              <a:t>主在十架  甘願背我的重擔</a:t>
-            </a:r>
-            <a:endParaRPr lang="en-US" altLang="zh-TW" sz="4800" b="1" dirty="0">
-              <a:solidFill>
-                <a:srgbClr val="000066"/>
-              </a:solidFill>
-              <a:latin typeface="微軟正黑體" pitchFamily="34" charset="-120"/>
-              <a:ea typeface="微軟正黑體" pitchFamily="34" charset="-120"/>
-            </a:endParaRPr>
-          </a:p>
-          <a:p>
-            <a:pPr algn="ctr">
-              <a:buNone/>
-            </a:pPr>
-            <a:r>
-              <a:rPr lang="zh-TW" altLang="en-US" sz="4800" b="1" dirty="0">
-                <a:solidFill>
-                  <a:srgbClr val="000066"/>
-                </a:solidFill>
-                <a:latin typeface="微軟正黑體" pitchFamily="34" charset="-120"/>
-                <a:ea typeface="微軟正黑體" pitchFamily="34" charset="-120"/>
-              </a:rPr>
-              <a:t>流血捨身為要赦免我罪</a:t>
-            </a:r>
-          </a:p>
-        </p:txBody>
-      </p:sp>
-      <p:sp>
-        <p:nvSpPr>
-          <p:cNvPr id="6" name="TextBox 5"/>
-          <p:cNvSpPr txBox="1"/>
-          <p:nvPr/>
-        </p:nvSpPr>
-        <p:spPr>
-          <a:xfrm>
-            <a:off x="179512" y="1203598"/>
-            <a:ext cx="720080" cy="830997"/>
+            <a:off x="0" y="3795887"/>
+            <a:ext cx="9144000" cy="523220"/>
           </a:xfrm>
           <a:prstGeom prst="rect">
             <a:avLst/>
@@ -3592,23 +3557,16 @@
           </a:bodyPr>
           <a:lstStyle/>
           <a:p>
-            <a:r>
-              <a:rPr lang="en-US" altLang="zh-CN" sz="4800" b="1" dirty="0">
+            <a:pPr algn="ctr"/>
+            <a:r>
+              <a:rPr lang="en-US" sz="2800" b="1" dirty="0">
                 <a:solidFill>
                   <a:srgbClr val="000066"/>
                 </a:solidFill>
               </a:rPr>
-              <a:t>2</a:t>
-            </a:r>
-            <a:r>
-              <a:rPr lang="en-US" altLang="zh-CN" sz="4800" b="1" dirty="0" smtClean="0">
-                <a:solidFill>
-                  <a:srgbClr val="000066"/>
-                </a:solidFill>
-              </a:rPr>
-              <a:t>.</a:t>
-            </a:r>
-            <a:endParaRPr lang="en-US" sz="4800" b="1" dirty="0">
+              <a:t>( 1 / 3 )</a:t>
+            </a:r>
+            <a:endParaRPr lang="vi-VN" sz="2800" b="1" dirty="0">
               <a:solidFill>
                 <a:srgbClr val="000066"/>
               </a:solidFill>
@@ -3617,6 +3575,11 @@
         </p:txBody>
       </p:sp>
     </p:spTree>
+    <p:extLst>
+      <p:ext uri="{BB962C8B-B14F-4D97-AF65-F5344CB8AC3E}">
+        <p14:creationId xmlns:p14="http://schemas.microsoft.com/office/powerpoint/2010/main" val="995657418"/>
+      </p:ext>
+    </p:extLst>
   </p:cSld>
   <p:clrMapOvr>
     <a:masterClrMapping/>
@@ -3629,7 +3592,13 @@
   <p:cSld>
     <p:spTree>
       <p:nvGrpSpPr>
-        <p:cNvPr id="1" name=""/>
+        <p:cNvPr id="1" name="">
+          <a:extLst>
+            <a:ext uri="{FF2B5EF4-FFF2-40B4-BE49-F238E27FC236}">
+              <a16:creationId xmlns:a16="http://schemas.microsoft.com/office/drawing/2014/main" id="{AA95186D-81C2-D5CA-B8D7-AC17327D4459}"/>
+            </a:ext>
+          </a:extLst>
+        </p:cNvPr>
         <p:cNvGrpSpPr/>
         <p:nvPr/>
       </p:nvGrpSpPr>
@@ -3643,139 +3612,147 @@
       </p:grpSpPr>
       <p:sp>
         <p:nvSpPr>
-          <p:cNvPr id="4" name="標題 3"/>
-          <p:cNvSpPr>
-            <a:spLocks noGrp="1"/>
-          </p:cNvSpPr>
-          <p:nvPr>
-            <p:ph type="title"/>
-          </p:nvPr>
-        </p:nvSpPr>
-        <p:spPr/>
-        <p:txBody>
-          <a:bodyPr>
+          <p:cNvPr id="5" name="內容版面配置區 4">
+            <a:extLst>
+              <a:ext uri="{FF2B5EF4-FFF2-40B4-BE49-F238E27FC236}">
+                <a16:creationId xmlns:a16="http://schemas.microsoft.com/office/drawing/2014/main" id="{E1627A8A-EB40-D19E-C45E-404094E53214}"/>
+              </a:ext>
+            </a:extLst>
+          </p:cNvPr>
+          <p:cNvSpPr>
+            <a:spLocks noGrp="1"/>
+          </p:cNvSpPr>
+          <p:nvPr>
+            <p:ph idx="1"/>
+          </p:nvPr>
+        </p:nvSpPr>
+        <p:spPr>
+          <a:xfrm>
+            <a:off x="0" y="1563639"/>
+            <a:ext cx="9144000" cy="1803647"/>
+          </a:xfrm>
+        </p:spPr>
+        <p:txBody>
+          <a:bodyPr anchor="ctr">
             <a:normAutofit/>
           </a:bodyPr>
           <a:lstStyle/>
           <a:p>
-            <a:r>
-              <a:rPr lang="zh-TW" altLang="en-US" sz="4000" b="1" dirty="0">
+            <a:pPr marL="0" indent="0" algn="ctr">
+              <a:buNone/>
+            </a:pPr>
+            <a:r>
+              <a:rPr lang="zh-TW" altLang="en-US" sz="4800" b="1" dirty="0">
                 <a:solidFill>
                   <a:srgbClr val="000066"/>
                 </a:solidFill>
-                <a:latin typeface="微軟正黑體" pitchFamily="34" charset="-120"/>
-                <a:ea typeface="微軟正黑體" pitchFamily="34" charset="-120"/>
+                <a:latin typeface="Microsoft JhengHei" pitchFamily="34" charset="-120"/>
+                <a:ea typeface="Microsoft JhengHei" pitchFamily="34" charset="-120"/>
               </a:rPr>
-              <a:t>你真偉大</a:t>
-            </a:r>
-          </a:p>
-        </p:txBody>
-      </p:sp>
-      <p:sp>
-        <p:nvSpPr>
-          <p:cNvPr id="5" name="內容版面配置區 4"/>
-          <p:cNvSpPr>
-            <a:spLocks noGrp="1"/>
-          </p:cNvSpPr>
-          <p:nvPr>
-            <p:ph idx="1"/>
-          </p:nvPr>
+              <a:t>我靈歌唱  讚美救主我神</a:t>
+            </a:r>
+          </a:p>
+          <a:p>
+            <a:pPr marL="0" indent="0" algn="ctr">
+              <a:buNone/>
+            </a:pPr>
+            <a:r>
+              <a:rPr lang="zh-TW" altLang="en-US" sz="4800" b="1" dirty="0">
+                <a:solidFill>
+                  <a:srgbClr val="000066"/>
+                </a:solidFill>
+                <a:latin typeface="Microsoft JhengHei" pitchFamily="34" charset="-120"/>
+                <a:ea typeface="Microsoft JhengHei" pitchFamily="34" charset="-120"/>
+              </a:rPr>
+              <a:t>祢真偉大  何等偉大</a:t>
+            </a:r>
+          </a:p>
+        </p:txBody>
+      </p:sp>
+      <p:sp>
+        <p:nvSpPr>
+          <p:cNvPr id="2" name="TextBox 1">
+            <a:extLst>
+              <a:ext uri="{FF2B5EF4-FFF2-40B4-BE49-F238E27FC236}">
+                <a16:creationId xmlns:a16="http://schemas.microsoft.com/office/drawing/2014/main" id="{4A0E4688-EAB9-4332-3A50-6E77C53F762D}"/>
+              </a:ext>
+            </a:extLst>
+          </p:cNvPr>
+          <p:cNvSpPr txBox="1"/>
+          <p:nvPr/>
         </p:nvSpPr>
         <p:spPr>
           <a:xfrm>
-            <a:off x="0" y="1200151"/>
-            <a:ext cx="9144000" cy="3394472"/>
+            <a:off x="0" y="3795887"/>
+            <a:ext cx="9144000" cy="523220"/>
           </a:xfrm>
+          <a:prstGeom prst="rect">
+            <a:avLst/>
+          </a:prstGeom>
+          <a:noFill/>
         </p:spPr>
         <p:txBody>
-          <a:bodyPr>
-            <a:noAutofit/>
+          <a:bodyPr wrap="square" rtlCol="0">
+            <a:spAutoFit/>
           </a:bodyPr>
           <a:lstStyle/>
           <a:p>
-            <a:pPr algn="ctr">
-              <a:buNone/>
-            </a:pPr>
-            <a:r>
-              <a:rPr lang="zh-TW" altLang="en-US" sz="4800" b="1" dirty="0">
+            <a:pPr algn="ctr"/>
+            <a:r>
+              <a:rPr lang="en-US" sz="2800" b="1" dirty="0">
                 <a:solidFill>
                   <a:srgbClr val="000066"/>
                 </a:solidFill>
-                <a:latin typeface="微軟正黑體" pitchFamily="34" charset="-120"/>
-                <a:ea typeface="微軟正黑體" pitchFamily="34" charset="-120"/>
+                <a:latin typeface="Microsoft JhengHei" pitchFamily="34" charset="-120"/>
+                <a:ea typeface="Microsoft JhengHei" pitchFamily="34" charset="-120"/>
               </a:rPr>
-              <a:t>我靈歌唱  讚美救主我神</a:t>
-            </a:r>
-            <a:endParaRPr lang="en-US" altLang="zh-TW" sz="4800" b="1" dirty="0">
+              <a:t>( 2 </a:t>
+            </a:r>
+            <a:r>
+              <a:rPr lang="zh-CN" altLang="en-US" sz="2800" b="1" dirty="0">
+                <a:solidFill>
+                  <a:srgbClr val="000066"/>
+                </a:solidFill>
+                <a:latin typeface="Microsoft JhengHei" pitchFamily="34" charset="-120"/>
+                <a:ea typeface="Microsoft JhengHei" pitchFamily="34" charset="-120"/>
+              </a:rPr>
+              <a:t>次</a:t>
+            </a:r>
+            <a:r>
+              <a:rPr lang="en-US" altLang="zh-CN" sz="2800" b="1" dirty="0">
+                <a:solidFill>
+                  <a:srgbClr val="000066"/>
+                </a:solidFill>
+                <a:latin typeface="Microsoft JhengHei" pitchFamily="34" charset="-120"/>
+                <a:ea typeface="Microsoft JhengHei" pitchFamily="34" charset="-120"/>
+              </a:rPr>
+              <a:t> </a:t>
+            </a:r>
+            <a:r>
+              <a:rPr lang="en-US" sz="2800" b="1" dirty="0">
+                <a:solidFill>
+                  <a:srgbClr val="000066"/>
+                </a:solidFill>
+                <a:latin typeface="Microsoft JhengHei" pitchFamily="34" charset="-120"/>
+                <a:ea typeface="Microsoft JhengHei" pitchFamily="34" charset="-120"/>
+              </a:rPr>
+              <a:t>)</a:t>
+            </a:r>
+            <a:endParaRPr lang="vi-VN" sz="2800" b="1" dirty="0">
               <a:solidFill>
                 <a:srgbClr val="000066"/>
               </a:solidFill>
-              <a:latin typeface="微軟正黑體" pitchFamily="34" charset="-120"/>
-              <a:ea typeface="微軟正黑體" pitchFamily="34" charset="-120"/>
+              <a:ea typeface="Microsoft JhengHei" pitchFamily="34" charset="-120"/>
             </a:endParaRPr>
           </a:p>
-          <a:p>
-            <a:pPr algn="ctr">
-              <a:buNone/>
-            </a:pPr>
-            <a:r>
-              <a:rPr lang="zh-TW" altLang="en-US" sz="4800" b="1" dirty="0">
-                <a:solidFill>
-                  <a:srgbClr val="000066"/>
-                </a:solidFill>
-                <a:latin typeface="微軟正黑體" pitchFamily="34" charset="-120"/>
-                <a:ea typeface="微軟正黑體" pitchFamily="34" charset="-120"/>
-              </a:rPr>
-              <a:t>你真偉大  何等偉大</a:t>
-            </a:r>
-            <a:endParaRPr lang="en-US" altLang="zh-TW" sz="4800" b="1" dirty="0">
-              <a:solidFill>
-                <a:srgbClr val="000066"/>
-              </a:solidFill>
-              <a:latin typeface="微軟正黑體" pitchFamily="34" charset="-120"/>
-              <a:ea typeface="微軟正黑體" pitchFamily="34" charset="-120"/>
-            </a:endParaRPr>
-          </a:p>
-          <a:p>
-            <a:pPr algn="ctr">
-              <a:buNone/>
-            </a:pPr>
-            <a:r>
-              <a:rPr lang="zh-TW" altLang="en-US" sz="4800" b="1" dirty="0">
-                <a:solidFill>
-                  <a:srgbClr val="000066"/>
-                </a:solidFill>
-                <a:latin typeface="微軟正黑體" pitchFamily="34" charset="-120"/>
-                <a:ea typeface="微軟正黑體" pitchFamily="34" charset="-120"/>
-              </a:rPr>
-              <a:t>我靈歌唱  讚美救主我神</a:t>
-            </a:r>
-            <a:endParaRPr lang="en-US" altLang="zh-TW" sz="4800" b="1" dirty="0">
-              <a:solidFill>
-                <a:srgbClr val="000066"/>
-              </a:solidFill>
-              <a:latin typeface="微軟正黑體" pitchFamily="34" charset="-120"/>
-              <a:ea typeface="微軟正黑體" pitchFamily="34" charset="-120"/>
-            </a:endParaRPr>
-          </a:p>
-          <a:p>
-            <a:pPr algn="ctr">
-              <a:buNone/>
-            </a:pPr>
-            <a:r>
-              <a:rPr lang="zh-TW" altLang="en-US" sz="4800" b="1" dirty="0">
-                <a:solidFill>
-                  <a:srgbClr val="000066"/>
-                </a:solidFill>
-                <a:latin typeface="微軟正黑體" pitchFamily="34" charset="-120"/>
-                <a:ea typeface="微軟正黑體" pitchFamily="34" charset="-120"/>
-              </a:rPr>
-              <a:t>你真偉大  何等偉大</a:t>
-            </a:r>
-          </a:p>
         </p:txBody>
       </p:sp>
     </p:spTree>
+    <p:extLst>
+      <p:ext uri="{BB962C8B-B14F-4D97-AF65-F5344CB8AC3E}">
+        <p14:creationId xmlns:p14="http://schemas.microsoft.com/office/powerpoint/2010/main" val="1101269443"/>
+      </p:ext>
+    </p:extLst>
   </p:cSld>
   <p:clrMapOvr>
     <a:masterClrMapping/>
@@ -3788,7 +3765,13 @@
   <p:cSld>
     <p:spTree>
       <p:nvGrpSpPr>
-        <p:cNvPr id="1" name=""/>
+        <p:cNvPr id="1" name="">
+          <a:extLst>
+            <a:ext uri="{FF2B5EF4-FFF2-40B4-BE49-F238E27FC236}">
+              <a16:creationId xmlns:a16="http://schemas.microsoft.com/office/drawing/2014/main" id="{BD1E31FF-0032-84A4-5862-473CE665FD51}"/>
+            </a:ext>
+          </a:extLst>
+        </p:cNvPr>
         <p:cNvGrpSpPr/>
         <p:nvPr/>
       </p:nvGrpSpPr>
@@ -3802,148 +3785,79 @@
       </p:grpSpPr>
       <p:sp>
         <p:nvSpPr>
-          <p:cNvPr id="4" name="標題 3"/>
-          <p:cNvSpPr>
-            <a:spLocks noGrp="1"/>
-          </p:cNvSpPr>
-          <p:nvPr>
-            <p:ph type="title"/>
-          </p:nvPr>
-        </p:nvSpPr>
-        <p:spPr/>
-        <p:txBody>
-          <a:bodyPr>
+          <p:cNvPr id="5" name="內容版面配置區 4">
+            <a:extLst>
+              <a:ext uri="{FF2B5EF4-FFF2-40B4-BE49-F238E27FC236}">
+                <a16:creationId xmlns:a16="http://schemas.microsoft.com/office/drawing/2014/main" id="{D3B66640-145F-551E-EF88-987FADB56679}"/>
+              </a:ext>
+            </a:extLst>
+          </p:cNvPr>
+          <p:cNvSpPr>
+            <a:spLocks noGrp="1"/>
+          </p:cNvSpPr>
+          <p:nvPr>
+            <p:ph idx="1"/>
+          </p:nvPr>
+        </p:nvSpPr>
+        <p:spPr>
+          <a:xfrm>
+            <a:off x="0" y="1563639"/>
+            <a:ext cx="9144000" cy="1803647"/>
+          </a:xfrm>
+        </p:spPr>
+        <p:txBody>
+          <a:bodyPr anchor="ctr">
             <a:normAutofit/>
           </a:bodyPr>
           <a:lstStyle/>
           <a:p>
-            <a:r>
-              <a:rPr lang="zh-TW" altLang="en-US" sz="4000" b="1" dirty="0">
+            <a:pPr marL="0" indent="0" algn="ctr">
+              <a:buNone/>
+            </a:pPr>
+            <a:r>
+              <a:rPr lang="zh-TW" altLang="en-US" sz="4800" b="1" dirty="0">
                 <a:solidFill>
                   <a:srgbClr val="000066"/>
                 </a:solidFill>
-                <a:latin typeface="微軟正黑體" pitchFamily="34" charset="-120"/>
-                <a:ea typeface="微軟正黑體" pitchFamily="34" charset="-120"/>
+                <a:latin typeface="Microsoft JhengHei" pitchFamily="34" charset="-120"/>
+                <a:ea typeface="Microsoft JhengHei" pitchFamily="34" charset="-120"/>
               </a:rPr>
-              <a:t>你真偉大</a:t>
-            </a:r>
-          </a:p>
-        </p:txBody>
-      </p:sp>
-      <p:sp>
-        <p:nvSpPr>
-          <p:cNvPr id="5" name="內容版面配置區 4"/>
-          <p:cNvSpPr>
-            <a:spLocks noGrp="1"/>
-          </p:cNvSpPr>
-          <p:nvPr>
-            <p:ph idx="1"/>
-          </p:nvPr>
+              <a:t>當我想到  神竟願差祂兒子</a:t>
+            </a:r>
+          </a:p>
+          <a:p>
+            <a:pPr marL="0" indent="0" algn="ctr">
+              <a:buNone/>
+            </a:pPr>
+            <a:r>
+              <a:rPr lang="zh-TW" altLang="en-US" sz="4800" b="1" dirty="0">
+                <a:solidFill>
+                  <a:srgbClr val="000066"/>
+                </a:solidFill>
+                <a:latin typeface="Microsoft JhengHei" pitchFamily="34" charset="-120"/>
+                <a:ea typeface="Microsoft JhengHei" pitchFamily="34" charset="-120"/>
+              </a:rPr>
+              <a:t>降世捨命  我幾乎不領會</a:t>
+            </a:r>
+          </a:p>
+        </p:txBody>
+      </p:sp>
+      <p:sp>
+        <p:nvSpPr>
+          <p:cNvPr id="3" name="TextBox 2">
+            <a:extLst>
+              <a:ext uri="{FF2B5EF4-FFF2-40B4-BE49-F238E27FC236}">
+                <a16:creationId xmlns:a16="http://schemas.microsoft.com/office/drawing/2014/main" id="{5D62C487-4531-73AF-FE5F-74DEE44FD75F}"/>
+              </a:ext>
+            </a:extLst>
+          </p:cNvPr>
+          <p:cNvSpPr txBox="1"/>
+          <p:nvPr/>
         </p:nvSpPr>
         <p:spPr>
           <a:xfrm>
-            <a:off x="0" y="1200151"/>
-            <a:ext cx="9144000" cy="3394472"/>
-          </a:xfrm>
-        </p:spPr>
-        <p:txBody>
-          <a:bodyPr>
-            <a:noAutofit/>
-          </a:bodyPr>
-          <a:lstStyle/>
-          <a:p>
-            <a:pPr algn="ctr">
-              <a:buNone/>
-            </a:pPr>
-            <a:r>
-              <a:rPr lang="zh-TW" altLang="en-US" sz="4800" b="1" dirty="0">
-                <a:solidFill>
-                  <a:srgbClr val="000066"/>
-                </a:solidFill>
-                <a:latin typeface="微軟正黑體" pitchFamily="34" charset="-120"/>
-                <a:ea typeface="微軟正黑體" pitchFamily="34" charset="-120"/>
-              </a:rPr>
-              <a:t>當主再來  歡呼聲響澈天空</a:t>
-            </a:r>
-            <a:endParaRPr lang="en-US" altLang="zh-TW" sz="4800" b="1" dirty="0">
-              <a:solidFill>
-                <a:srgbClr val="000066"/>
-              </a:solidFill>
-              <a:latin typeface="微軟正黑體" pitchFamily="34" charset="-120"/>
-              <a:ea typeface="微軟正黑體" pitchFamily="34" charset="-120"/>
-            </a:endParaRPr>
-          </a:p>
-          <a:p>
-            <a:pPr algn="ctr">
-              <a:buNone/>
-            </a:pPr>
-            <a:r>
-              <a:rPr lang="zh-TW" altLang="en-US" sz="4800" b="1" dirty="0">
-                <a:solidFill>
-                  <a:srgbClr val="000066"/>
-                </a:solidFill>
-                <a:latin typeface="微軟正黑體" pitchFamily="34" charset="-120"/>
-                <a:ea typeface="微軟正黑體" pitchFamily="34" charset="-120"/>
-              </a:rPr>
-              <a:t>何等喜樂主接我回天家</a:t>
-            </a:r>
-            <a:endParaRPr lang="en-US" altLang="zh-TW" sz="4800" b="1" dirty="0">
-              <a:solidFill>
-                <a:srgbClr val="000066"/>
-              </a:solidFill>
-              <a:latin typeface="微軟正黑體" pitchFamily="34" charset="-120"/>
-              <a:ea typeface="微軟正黑體" pitchFamily="34" charset="-120"/>
-            </a:endParaRPr>
-          </a:p>
-          <a:p>
-            <a:pPr algn="ctr">
-              <a:buNone/>
-            </a:pPr>
-            <a:r>
-              <a:rPr lang="zh-TW" altLang="en-US" sz="4800" b="1" dirty="0">
-                <a:solidFill>
-                  <a:srgbClr val="000066"/>
-                </a:solidFill>
-                <a:latin typeface="微軟正黑體" pitchFamily="34" charset="-120"/>
-                <a:ea typeface="微軟正黑體" pitchFamily="34" charset="-120"/>
-              </a:rPr>
-              <a:t>我要跪下  謙恭的崇拜敬奉</a:t>
-            </a:r>
-            <a:endParaRPr lang="en-US" altLang="zh-TW" sz="4800" b="1" dirty="0">
-              <a:solidFill>
-                <a:srgbClr val="000066"/>
-              </a:solidFill>
-              <a:latin typeface="微軟正黑體" pitchFamily="34" charset="-120"/>
-              <a:ea typeface="微軟正黑體" pitchFamily="34" charset="-120"/>
-            </a:endParaRPr>
-          </a:p>
-          <a:p>
-            <a:pPr algn="ctr">
-              <a:buNone/>
-            </a:pPr>
-            <a:r>
-              <a:rPr lang="zh-TW" altLang="en-US" sz="4800" b="1" dirty="0">
-                <a:solidFill>
-                  <a:srgbClr val="000066"/>
-                </a:solidFill>
-                <a:latin typeface="微軟正黑體" pitchFamily="34" charset="-120"/>
-                <a:ea typeface="微軟正黑體" pitchFamily="34" charset="-120"/>
-              </a:rPr>
-              <a:t>並要頌揚神阿你真偉大</a:t>
-            </a:r>
-          </a:p>
-        </p:txBody>
-      </p:sp>
-      <p:sp>
-        <p:nvSpPr>
-          <p:cNvPr id="6" name="TextBox 5"/>
-          <p:cNvSpPr txBox="1"/>
-          <p:nvPr/>
-        </p:nvSpPr>
-        <p:spPr>
-          <a:xfrm>
-            <a:off x="179512" y="1203598"/>
-            <a:ext cx="720080" cy="830997"/>
+            <a:off x="0" y="3795887"/>
+            <a:ext cx="9144000" cy="523220"/>
           </a:xfrm>
           <a:prstGeom prst="rect">
             <a:avLst/>
@@ -3956,23 +3870,16 @@
           </a:bodyPr>
           <a:lstStyle/>
           <a:p>
-            <a:r>
-              <a:rPr lang="en-US" altLang="zh-CN" sz="4800" b="1" dirty="0">
+            <a:pPr algn="ctr"/>
+            <a:r>
+              <a:rPr lang="en-US" sz="2800" b="1" dirty="0">
                 <a:solidFill>
                   <a:srgbClr val="000066"/>
                 </a:solidFill>
               </a:rPr>
-              <a:t>3</a:t>
-            </a:r>
-            <a:r>
-              <a:rPr lang="en-US" altLang="zh-CN" sz="4800" b="1" dirty="0" smtClean="0">
-                <a:solidFill>
-                  <a:srgbClr val="000066"/>
-                </a:solidFill>
-              </a:rPr>
-              <a:t>.</a:t>
-            </a:r>
-            <a:endParaRPr lang="en-US" sz="4800" b="1" dirty="0">
+              <a:t>( 2 / 3 )</a:t>
+            </a:r>
+            <a:endParaRPr lang="vi-VN" sz="2800" b="1" dirty="0">
               <a:solidFill>
                 <a:srgbClr val="000066"/>
               </a:solidFill>
@@ -3981,6 +3888,11 @@
         </p:txBody>
       </p:sp>
     </p:spTree>
+    <p:extLst>
+      <p:ext uri="{BB962C8B-B14F-4D97-AF65-F5344CB8AC3E}">
+        <p14:creationId xmlns:p14="http://schemas.microsoft.com/office/powerpoint/2010/main" val="2568541198"/>
+      </p:ext>
+    </p:extLst>
   </p:cSld>
   <p:clrMapOvr>
     <a:masterClrMapping/>
@@ -3993,7 +3905,13 @@
   <p:cSld>
     <p:spTree>
       <p:nvGrpSpPr>
-        <p:cNvPr id="1" name=""/>
+        <p:cNvPr id="1" name="">
+          <a:extLst>
+            <a:ext uri="{FF2B5EF4-FFF2-40B4-BE49-F238E27FC236}">
+              <a16:creationId xmlns:a16="http://schemas.microsoft.com/office/drawing/2014/main" id="{01B67615-A6FE-8AB0-4E86-F2C600CB9005}"/>
+            </a:ext>
+          </a:extLst>
+        </p:cNvPr>
         <p:cNvGrpSpPr/>
         <p:nvPr/>
       </p:nvGrpSpPr>
@@ -4007,79 +3925,173 @@
       </p:grpSpPr>
       <p:sp>
         <p:nvSpPr>
-          <p:cNvPr id="4" name="標題 3"/>
-          <p:cNvSpPr>
-            <a:spLocks noGrp="1"/>
-          </p:cNvSpPr>
-          <p:nvPr>
-            <p:ph type="title"/>
-          </p:nvPr>
-        </p:nvSpPr>
-        <p:spPr/>
-        <p:txBody>
-          <a:bodyPr>
+          <p:cNvPr id="5" name="內容版面配置區 4">
+            <a:extLst>
+              <a:ext uri="{FF2B5EF4-FFF2-40B4-BE49-F238E27FC236}">
+                <a16:creationId xmlns:a16="http://schemas.microsoft.com/office/drawing/2014/main" id="{FADA0328-7966-09BB-5600-88DC38BCAA58}"/>
+              </a:ext>
+            </a:extLst>
+          </p:cNvPr>
+          <p:cNvSpPr>
+            <a:spLocks noGrp="1"/>
+          </p:cNvSpPr>
+          <p:nvPr>
+            <p:ph idx="1"/>
+          </p:nvPr>
+        </p:nvSpPr>
+        <p:spPr>
+          <a:xfrm>
+            <a:off x="0" y="1563639"/>
+            <a:ext cx="9144000" cy="1803647"/>
+          </a:xfrm>
+        </p:spPr>
+        <p:txBody>
+          <a:bodyPr anchor="ctr">
             <a:normAutofit/>
           </a:bodyPr>
           <a:lstStyle/>
           <a:p>
-            <a:r>
-              <a:rPr lang="zh-TW" altLang="en-US" sz="4000" b="1" dirty="0">
+            <a:pPr marL="0" indent="0" algn="ctr">
+              <a:buNone/>
+            </a:pPr>
+            <a:r>
+              <a:rPr lang="zh-TW" altLang="en-US" sz="4800" b="1" dirty="0">
                 <a:solidFill>
                   <a:srgbClr val="000066"/>
                 </a:solidFill>
-                <a:latin typeface="微軟正黑體" pitchFamily="34" charset="-120"/>
-                <a:ea typeface="微軟正黑體" pitchFamily="34" charset="-120"/>
+                <a:latin typeface="Microsoft JhengHei" pitchFamily="34" charset="-120"/>
+                <a:ea typeface="Microsoft JhengHei" pitchFamily="34" charset="-120"/>
               </a:rPr>
-              <a:t>你真偉大</a:t>
-            </a:r>
-          </a:p>
-        </p:txBody>
-      </p:sp>
-      <p:sp>
-        <p:nvSpPr>
-          <p:cNvPr id="5" name="內容版面配置區 4"/>
-          <p:cNvSpPr>
-            <a:spLocks noGrp="1"/>
-          </p:cNvSpPr>
-          <p:nvPr>
-            <p:ph idx="1"/>
-          </p:nvPr>
+              <a:t>主在十架  甘願背我的重擔</a:t>
+            </a:r>
+          </a:p>
+          <a:p>
+            <a:pPr marL="0" indent="0" algn="ctr">
+              <a:buNone/>
+            </a:pPr>
+            <a:r>
+              <a:rPr lang="zh-TW" altLang="en-US" sz="4800" b="1" dirty="0">
+                <a:solidFill>
+                  <a:srgbClr val="000066"/>
+                </a:solidFill>
+                <a:latin typeface="Microsoft JhengHei" pitchFamily="34" charset="-120"/>
+                <a:ea typeface="Microsoft JhengHei" pitchFamily="34" charset="-120"/>
+              </a:rPr>
+              <a:t>流血捨身為要赦免我罪</a:t>
+            </a:r>
+          </a:p>
+        </p:txBody>
+      </p:sp>
+      <p:sp>
+        <p:nvSpPr>
+          <p:cNvPr id="3" name="TextBox 2">
+            <a:extLst>
+              <a:ext uri="{FF2B5EF4-FFF2-40B4-BE49-F238E27FC236}">
+                <a16:creationId xmlns:a16="http://schemas.microsoft.com/office/drawing/2014/main" id="{68DCDBA5-CABC-1D04-106F-7C406A737877}"/>
+              </a:ext>
+            </a:extLst>
+          </p:cNvPr>
+          <p:cNvSpPr txBox="1"/>
+          <p:nvPr/>
         </p:nvSpPr>
         <p:spPr>
           <a:xfrm>
-            <a:off x="0" y="1200151"/>
-            <a:ext cx="9144000" cy="3394472"/>
+            <a:off x="0" y="3795887"/>
+            <a:ext cx="9144000" cy="523220"/>
           </a:xfrm>
+          <a:prstGeom prst="rect">
+            <a:avLst/>
+          </a:prstGeom>
+          <a:noFill/>
         </p:spPr>
         <p:txBody>
-          <a:bodyPr>
-            <a:noAutofit/>
+          <a:bodyPr wrap="square" rtlCol="0">
+            <a:spAutoFit/>
           </a:bodyPr>
           <a:lstStyle/>
           <a:p>
-            <a:pPr algn="ctr">
-              <a:buNone/>
-            </a:pPr>
-            <a:r>
-              <a:rPr lang="zh-TW" altLang="en-US" sz="4800" b="1" dirty="0">
+            <a:pPr algn="ctr"/>
+            <a:r>
+              <a:rPr lang="en-US" sz="2800" b="1" dirty="0">
                 <a:solidFill>
                   <a:srgbClr val="000066"/>
                 </a:solidFill>
-                <a:latin typeface="微軟正黑體" pitchFamily="34" charset="-120"/>
-                <a:ea typeface="微軟正黑體" pitchFamily="34" charset="-120"/>
               </a:rPr>
-              <a:t>我靈歌唱  讚美救主我神</a:t>
-            </a:r>
-            <a:endParaRPr lang="en-US" altLang="zh-TW" sz="4800" b="1" dirty="0">
+              <a:t>( 2 / 3 )</a:t>
+            </a:r>
+            <a:endParaRPr lang="vi-VN" sz="2800" b="1" dirty="0">
               <a:solidFill>
                 <a:srgbClr val="000066"/>
               </a:solidFill>
-              <a:latin typeface="微軟正黑體" pitchFamily="34" charset="-120"/>
-              <a:ea typeface="微軟正黑體" pitchFamily="34" charset="-120"/>
             </a:endParaRPr>
           </a:p>
-          <a:p>
-            <a:pPr algn="ctr">
+        </p:txBody>
+      </p:sp>
+    </p:spTree>
+    <p:extLst>
+      <p:ext uri="{BB962C8B-B14F-4D97-AF65-F5344CB8AC3E}">
+        <p14:creationId xmlns:p14="http://schemas.microsoft.com/office/powerpoint/2010/main" val="2255955020"/>
+      </p:ext>
+    </p:extLst>
+  </p:cSld>
+  <p:clrMapOvr>
+    <a:masterClrMapping/>
+  </p:clrMapOvr>
+</p:sld>
+</file>
+
+<file path=ppt/slides/slide7.xml><?xml version="1.0" encoding="utf-8"?>
+<p:sld xmlns:a="http://schemas.openxmlformats.org/drawingml/2006/main" xmlns:r="http://schemas.openxmlformats.org/officeDocument/2006/relationships" xmlns:p="http://schemas.openxmlformats.org/presentationml/2006/main">
+  <p:cSld>
+    <p:spTree>
+      <p:nvGrpSpPr>
+        <p:cNvPr id="1" name="">
+          <a:extLst>
+            <a:ext uri="{FF2B5EF4-FFF2-40B4-BE49-F238E27FC236}">
+              <a16:creationId xmlns:a16="http://schemas.microsoft.com/office/drawing/2014/main" id="{21DBB40F-EDED-BCF3-99D0-D1F2375A39EE}"/>
+            </a:ext>
+          </a:extLst>
+        </p:cNvPr>
+        <p:cNvGrpSpPr/>
+        <p:nvPr/>
+      </p:nvGrpSpPr>
+      <p:grpSpPr>
+        <a:xfrm>
+          <a:off x="0" y="0"/>
+          <a:ext cx="0" cy="0"/>
+          <a:chOff x="0" y="0"/>
+          <a:chExt cx="0" cy="0"/>
+        </a:xfrm>
+      </p:grpSpPr>
+      <p:sp>
+        <p:nvSpPr>
+          <p:cNvPr id="5" name="內容版面配置區 4">
+            <a:extLst>
+              <a:ext uri="{FF2B5EF4-FFF2-40B4-BE49-F238E27FC236}">
+                <a16:creationId xmlns:a16="http://schemas.microsoft.com/office/drawing/2014/main" id="{17DF51FF-954A-146C-0FA2-EB61D298109F}"/>
+              </a:ext>
+            </a:extLst>
+          </p:cNvPr>
+          <p:cNvSpPr>
+            <a:spLocks noGrp="1"/>
+          </p:cNvSpPr>
+          <p:nvPr>
+            <p:ph idx="1"/>
+          </p:nvPr>
+        </p:nvSpPr>
+        <p:spPr>
+          <a:xfrm>
+            <a:off x="0" y="1563639"/>
+            <a:ext cx="9144000" cy="1803647"/>
+          </a:xfrm>
+        </p:spPr>
+        <p:txBody>
+          <a:bodyPr anchor="ctr">
+            <a:normAutofit/>
+          </a:bodyPr>
+          <a:lstStyle/>
+          <a:p>
+            <a:pPr marL="0" indent="0" algn="ctr">
               <a:buNone/>
             </a:pPr>
             <a:r>
@@ -4087,21 +4099,172 @@
                 <a:solidFill>
                   <a:srgbClr val="000066"/>
                 </a:solidFill>
-                <a:latin typeface="微軟正黑體" pitchFamily="34" charset="-120"/>
-                <a:ea typeface="微軟正黑體" pitchFamily="34" charset="-120"/>
+                <a:latin typeface="Microsoft JhengHei" pitchFamily="34" charset="-120"/>
+                <a:ea typeface="Microsoft JhengHei" pitchFamily="34" charset="-120"/>
               </a:rPr>
-              <a:t>你真偉大  何等偉大</a:t>
-            </a:r>
-            <a:endParaRPr lang="en-US" altLang="zh-TW" sz="4800" b="1" dirty="0">
+              <a:t>我靈歌唱  讚美救主我神</a:t>
+            </a:r>
+          </a:p>
+          <a:p>
+            <a:pPr marL="0" indent="0" algn="ctr">
+              <a:buNone/>
+            </a:pPr>
+            <a:r>
+              <a:rPr lang="zh-TW" altLang="en-US" sz="4800" b="1" dirty="0">
+                <a:solidFill>
+                  <a:srgbClr val="000066"/>
+                </a:solidFill>
+                <a:latin typeface="Microsoft JhengHei" pitchFamily="34" charset="-120"/>
+                <a:ea typeface="Microsoft JhengHei" pitchFamily="34" charset="-120"/>
+              </a:rPr>
+              <a:t>祢真偉大  何等偉大</a:t>
+            </a:r>
+          </a:p>
+        </p:txBody>
+      </p:sp>
+      <p:sp>
+        <p:nvSpPr>
+          <p:cNvPr id="2" name="TextBox 1">
+            <a:extLst>
+              <a:ext uri="{FF2B5EF4-FFF2-40B4-BE49-F238E27FC236}">
+                <a16:creationId xmlns:a16="http://schemas.microsoft.com/office/drawing/2014/main" id="{E61CEAF0-FA73-48B1-040F-938C89195A2F}"/>
+              </a:ext>
+            </a:extLst>
+          </p:cNvPr>
+          <p:cNvSpPr txBox="1"/>
+          <p:nvPr/>
+        </p:nvSpPr>
+        <p:spPr>
+          <a:xfrm>
+            <a:off x="0" y="3795887"/>
+            <a:ext cx="9144000" cy="523220"/>
+          </a:xfrm>
+          <a:prstGeom prst="rect">
+            <a:avLst/>
+          </a:prstGeom>
+          <a:noFill/>
+        </p:spPr>
+        <p:txBody>
+          <a:bodyPr wrap="square" rtlCol="0">
+            <a:spAutoFit/>
+          </a:bodyPr>
+          <a:lstStyle/>
+          <a:p>
+            <a:pPr algn="ctr"/>
+            <a:r>
+              <a:rPr lang="en-US" sz="2800" b="1" dirty="0">
+                <a:solidFill>
+                  <a:srgbClr val="000066"/>
+                </a:solidFill>
+                <a:latin typeface="Microsoft JhengHei" pitchFamily="34" charset="-120"/>
+                <a:ea typeface="Microsoft JhengHei" pitchFamily="34" charset="-120"/>
+              </a:rPr>
+              <a:t>( 2 </a:t>
+            </a:r>
+            <a:r>
+              <a:rPr lang="zh-CN" altLang="en-US" sz="2800" b="1" dirty="0">
+                <a:solidFill>
+                  <a:srgbClr val="000066"/>
+                </a:solidFill>
+                <a:latin typeface="Microsoft JhengHei" pitchFamily="34" charset="-120"/>
+                <a:ea typeface="Microsoft JhengHei" pitchFamily="34" charset="-120"/>
+              </a:rPr>
+              <a:t>次</a:t>
+            </a:r>
+            <a:r>
+              <a:rPr lang="en-US" altLang="zh-CN" sz="2800" b="1" dirty="0">
+                <a:solidFill>
+                  <a:srgbClr val="000066"/>
+                </a:solidFill>
+                <a:latin typeface="Microsoft JhengHei" pitchFamily="34" charset="-120"/>
+                <a:ea typeface="Microsoft JhengHei" pitchFamily="34" charset="-120"/>
+              </a:rPr>
+              <a:t> </a:t>
+            </a:r>
+            <a:r>
+              <a:rPr lang="en-US" sz="2800" b="1" dirty="0">
+                <a:solidFill>
+                  <a:srgbClr val="000066"/>
+                </a:solidFill>
+                <a:latin typeface="Microsoft JhengHei" pitchFamily="34" charset="-120"/>
+                <a:ea typeface="Microsoft JhengHei" pitchFamily="34" charset="-120"/>
+              </a:rPr>
+              <a:t>)</a:t>
+            </a:r>
+            <a:endParaRPr lang="vi-VN" sz="2800" b="1" dirty="0">
               <a:solidFill>
                 <a:srgbClr val="000066"/>
               </a:solidFill>
-              <a:latin typeface="微軟正黑體" pitchFamily="34" charset="-120"/>
-              <a:ea typeface="微軟正黑體" pitchFamily="34" charset="-120"/>
+              <a:ea typeface="Microsoft JhengHei" pitchFamily="34" charset="-120"/>
             </a:endParaRPr>
           </a:p>
-          <a:p>
-            <a:pPr algn="ctr">
+        </p:txBody>
+      </p:sp>
+    </p:spTree>
+    <p:extLst>
+      <p:ext uri="{BB962C8B-B14F-4D97-AF65-F5344CB8AC3E}">
+        <p14:creationId xmlns:p14="http://schemas.microsoft.com/office/powerpoint/2010/main" val="1155556393"/>
+      </p:ext>
+    </p:extLst>
+  </p:cSld>
+  <p:clrMapOvr>
+    <a:masterClrMapping/>
+  </p:clrMapOvr>
+</p:sld>
+</file>
+
+<file path=ppt/slides/slide8.xml><?xml version="1.0" encoding="utf-8"?>
+<p:sld xmlns:a="http://schemas.openxmlformats.org/drawingml/2006/main" xmlns:r="http://schemas.openxmlformats.org/officeDocument/2006/relationships" xmlns:p="http://schemas.openxmlformats.org/presentationml/2006/main">
+  <p:cSld>
+    <p:spTree>
+      <p:nvGrpSpPr>
+        <p:cNvPr id="1" name="">
+          <a:extLst>
+            <a:ext uri="{FF2B5EF4-FFF2-40B4-BE49-F238E27FC236}">
+              <a16:creationId xmlns:a16="http://schemas.microsoft.com/office/drawing/2014/main" id="{E6529C33-A288-31E0-F60B-39857B0E3A4B}"/>
+            </a:ext>
+          </a:extLst>
+        </p:cNvPr>
+        <p:cNvGrpSpPr/>
+        <p:nvPr/>
+      </p:nvGrpSpPr>
+      <p:grpSpPr>
+        <a:xfrm>
+          <a:off x="0" y="0"/>
+          <a:ext cx="0" cy="0"/>
+          <a:chOff x="0" y="0"/>
+          <a:chExt cx="0" cy="0"/>
+        </a:xfrm>
+      </p:grpSpPr>
+      <p:sp>
+        <p:nvSpPr>
+          <p:cNvPr id="5" name="內容版面配置區 4">
+            <a:extLst>
+              <a:ext uri="{FF2B5EF4-FFF2-40B4-BE49-F238E27FC236}">
+                <a16:creationId xmlns:a16="http://schemas.microsoft.com/office/drawing/2014/main" id="{0B83A58D-F2A0-DC03-FFEB-2CFE9FEE7595}"/>
+              </a:ext>
+            </a:extLst>
+          </p:cNvPr>
+          <p:cNvSpPr>
+            <a:spLocks noGrp="1"/>
+          </p:cNvSpPr>
+          <p:nvPr>
+            <p:ph idx="1"/>
+          </p:nvPr>
+        </p:nvSpPr>
+        <p:spPr>
+          <a:xfrm>
+            <a:off x="0" y="1563639"/>
+            <a:ext cx="9144000" cy="1803647"/>
+          </a:xfrm>
+        </p:spPr>
+        <p:txBody>
+          <a:bodyPr anchor="ctr">
+            <a:normAutofit/>
+          </a:bodyPr>
+          <a:lstStyle/>
+          <a:p>
+            <a:pPr marL="0" indent="0" algn="ctr">
               <a:buNone/>
             </a:pPr>
             <a:r>
@@ -4109,21 +4272,139 @@
                 <a:solidFill>
                   <a:srgbClr val="000066"/>
                 </a:solidFill>
-                <a:latin typeface="微軟正黑體" pitchFamily="34" charset="-120"/>
-                <a:ea typeface="微軟正黑體" pitchFamily="34" charset="-120"/>
+                <a:latin typeface="Microsoft JhengHei" pitchFamily="34" charset="-120"/>
+                <a:ea typeface="Microsoft JhengHei" pitchFamily="34" charset="-120"/>
               </a:rPr>
-              <a:t>我靈歌唱  讚美救主我神</a:t>
-            </a:r>
-            <a:endParaRPr lang="en-US" altLang="zh-TW" sz="4800" b="1" dirty="0">
+              <a:t>當主再來  歡呼聲響澈天空</a:t>
+            </a:r>
+          </a:p>
+          <a:p>
+            <a:pPr marL="0" indent="0" algn="ctr">
+              <a:buNone/>
+            </a:pPr>
+            <a:r>
+              <a:rPr lang="zh-TW" altLang="en-US" sz="4800" b="1" dirty="0">
+                <a:solidFill>
+                  <a:srgbClr val="000066"/>
+                </a:solidFill>
+                <a:latin typeface="Microsoft JhengHei" pitchFamily="34" charset="-120"/>
+                <a:ea typeface="Microsoft JhengHei" pitchFamily="34" charset="-120"/>
+              </a:rPr>
+              <a:t>何等喜樂主接我回天家</a:t>
+            </a:r>
+          </a:p>
+        </p:txBody>
+      </p:sp>
+      <p:sp>
+        <p:nvSpPr>
+          <p:cNvPr id="3" name="TextBox 2">
+            <a:extLst>
+              <a:ext uri="{FF2B5EF4-FFF2-40B4-BE49-F238E27FC236}">
+                <a16:creationId xmlns:a16="http://schemas.microsoft.com/office/drawing/2014/main" id="{903BF3DD-7AE3-2483-0952-B55ACBB874FB}"/>
+              </a:ext>
+            </a:extLst>
+          </p:cNvPr>
+          <p:cNvSpPr txBox="1"/>
+          <p:nvPr/>
+        </p:nvSpPr>
+        <p:spPr>
+          <a:xfrm>
+            <a:off x="0" y="3795887"/>
+            <a:ext cx="9144000" cy="523220"/>
+          </a:xfrm>
+          <a:prstGeom prst="rect">
+            <a:avLst/>
+          </a:prstGeom>
+          <a:noFill/>
+        </p:spPr>
+        <p:txBody>
+          <a:bodyPr wrap="square" rtlCol="0">
+            <a:spAutoFit/>
+          </a:bodyPr>
+          <a:lstStyle/>
+          <a:p>
+            <a:pPr algn="ctr"/>
+            <a:r>
+              <a:rPr lang="en-US" sz="2800" b="1" dirty="0">
+                <a:solidFill>
+                  <a:srgbClr val="000066"/>
+                </a:solidFill>
+              </a:rPr>
+              <a:t>( 3 / 3 )</a:t>
+            </a:r>
+            <a:endParaRPr lang="vi-VN" sz="2800" b="1" dirty="0">
               <a:solidFill>
                 <a:srgbClr val="000066"/>
               </a:solidFill>
-              <a:latin typeface="微軟正黑體" pitchFamily="34" charset="-120"/>
-              <a:ea typeface="微軟正黑體" pitchFamily="34" charset="-120"/>
             </a:endParaRPr>
           </a:p>
-          <a:p>
-            <a:pPr algn="ctr">
+        </p:txBody>
+      </p:sp>
+    </p:spTree>
+    <p:extLst>
+      <p:ext uri="{BB962C8B-B14F-4D97-AF65-F5344CB8AC3E}">
+        <p14:creationId xmlns:p14="http://schemas.microsoft.com/office/powerpoint/2010/main" val="1650472860"/>
+      </p:ext>
+    </p:extLst>
+  </p:cSld>
+  <p:clrMapOvr>
+    <a:masterClrMapping/>
+  </p:clrMapOvr>
+</p:sld>
+</file>
+
+<file path=ppt/slides/slide9.xml><?xml version="1.0" encoding="utf-8"?>
+<p:sld xmlns:a="http://schemas.openxmlformats.org/drawingml/2006/main" xmlns:r="http://schemas.openxmlformats.org/officeDocument/2006/relationships" xmlns:p="http://schemas.openxmlformats.org/presentationml/2006/main">
+  <p:cSld>
+    <p:spTree>
+      <p:nvGrpSpPr>
+        <p:cNvPr id="1" name="">
+          <a:extLst>
+            <a:ext uri="{FF2B5EF4-FFF2-40B4-BE49-F238E27FC236}">
+              <a16:creationId xmlns:a16="http://schemas.microsoft.com/office/drawing/2014/main" id="{E1CEA86D-0286-402A-49FF-633D51F874F8}"/>
+            </a:ext>
+          </a:extLst>
+        </p:cNvPr>
+        <p:cNvGrpSpPr/>
+        <p:nvPr/>
+      </p:nvGrpSpPr>
+      <p:grpSpPr>
+        <a:xfrm>
+          <a:off x="0" y="0"/>
+          <a:ext cx="0" cy="0"/>
+          <a:chOff x="0" y="0"/>
+          <a:chExt cx="0" cy="0"/>
+        </a:xfrm>
+      </p:grpSpPr>
+      <p:sp>
+        <p:nvSpPr>
+          <p:cNvPr id="5" name="內容版面配置區 4">
+            <a:extLst>
+              <a:ext uri="{FF2B5EF4-FFF2-40B4-BE49-F238E27FC236}">
+                <a16:creationId xmlns:a16="http://schemas.microsoft.com/office/drawing/2014/main" id="{3E8C38D1-57A5-155B-5E90-24A43F0C65F2}"/>
+              </a:ext>
+            </a:extLst>
+          </p:cNvPr>
+          <p:cNvSpPr>
+            <a:spLocks noGrp="1"/>
+          </p:cNvSpPr>
+          <p:nvPr>
+            <p:ph idx="1"/>
+          </p:nvPr>
+        </p:nvSpPr>
+        <p:spPr>
+          <a:xfrm>
+            <a:off x="0" y="1563639"/>
+            <a:ext cx="9144000" cy="1803647"/>
+          </a:xfrm>
+        </p:spPr>
+        <p:txBody>
+          <a:bodyPr anchor="ctr">
+            <a:normAutofit/>
+          </a:bodyPr>
+          <a:lstStyle/>
+          <a:p>
+            <a:pPr marL="0" indent="0" algn="ctr">
               <a:buNone/>
             </a:pPr>
             <a:r>
@@ -4131,15 +4412,80 @@
                 <a:solidFill>
                   <a:srgbClr val="000066"/>
                 </a:solidFill>
-                <a:latin typeface="微軟正黑體" pitchFamily="34" charset="-120"/>
-                <a:ea typeface="微軟正黑體" pitchFamily="34" charset="-120"/>
+                <a:latin typeface="Microsoft JhengHei" pitchFamily="34" charset="-120"/>
+                <a:ea typeface="Microsoft JhengHei" pitchFamily="34" charset="-120"/>
               </a:rPr>
-              <a:t>你真偉大  何等偉大</a:t>
-            </a:r>
+              <a:t>我要跪下  謙恭的崇拜敬奉</a:t>
+            </a:r>
+          </a:p>
+          <a:p>
+            <a:pPr marL="0" indent="0" algn="ctr">
+              <a:buNone/>
+            </a:pPr>
+            <a:r>
+              <a:rPr lang="zh-TW" altLang="en-US" sz="4800" b="1" dirty="0">
+                <a:solidFill>
+                  <a:srgbClr val="000066"/>
+                </a:solidFill>
+                <a:latin typeface="Microsoft JhengHei" pitchFamily="34" charset="-120"/>
+                <a:ea typeface="Microsoft JhengHei" pitchFamily="34" charset="-120"/>
+              </a:rPr>
+              <a:t>並要頌揚神阿祢真偉大</a:t>
+            </a:r>
+          </a:p>
+        </p:txBody>
+      </p:sp>
+      <p:sp>
+        <p:nvSpPr>
+          <p:cNvPr id="3" name="TextBox 2">
+            <a:extLst>
+              <a:ext uri="{FF2B5EF4-FFF2-40B4-BE49-F238E27FC236}">
+                <a16:creationId xmlns:a16="http://schemas.microsoft.com/office/drawing/2014/main" id="{B2F78F73-03B1-FD73-8A11-41A782592C07}"/>
+              </a:ext>
+            </a:extLst>
+          </p:cNvPr>
+          <p:cNvSpPr txBox="1"/>
+          <p:nvPr/>
+        </p:nvSpPr>
+        <p:spPr>
+          <a:xfrm>
+            <a:off x="0" y="3795887"/>
+            <a:ext cx="9144000" cy="523220"/>
+          </a:xfrm>
+          <a:prstGeom prst="rect">
+            <a:avLst/>
+          </a:prstGeom>
+          <a:noFill/>
+        </p:spPr>
+        <p:txBody>
+          <a:bodyPr wrap="square" rtlCol="0">
+            <a:spAutoFit/>
+          </a:bodyPr>
+          <a:lstStyle/>
+          <a:p>
+            <a:pPr algn="ctr"/>
+            <a:r>
+              <a:rPr lang="en-US" sz="2800" b="1" dirty="0">
+                <a:solidFill>
+                  <a:srgbClr val="000066"/>
+                </a:solidFill>
+              </a:rPr>
+              <a:t>( 3 / 3 )</a:t>
+            </a:r>
+            <a:endParaRPr lang="vi-VN" sz="2800" b="1" dirty="0">
+              <a:solidFill>
+                <a:srgbClr val="000066"/>
+              </a:solidFill>
+            </a:endParaRPr>
           </a:p>
         </p:txBody>
       </p:sp>
     </p:spTree>
+    <p:extLst>
+      <p:ext uri="{BB962C8B-B14F-4D97-AF65-F5344CB8AC3E}">
+        <p14:creationId xmlns:p14="http://schemas.microsoft.com/office/powerpoint/2010/main" val="4140343795"/>
+      </p:ext>
+    </p:extLst>
   </p:cSld>
   <p:clrMapOvr>
     <a:masterClrMapping/>
